--- a/it/slides/20-Architettura_dei_Calcolatori-Scheda_Video.pptx
+++ b/it/slides/20-Architettura_dei_Calcolatori-Scheda_Video.pptx
@@ -126,26 +126,26 @@
   <p:extLst>
     <p:ext uri="{521415D9-36F7-43E2-AB2F-B90AF26B5E84}">
       <p14:sectionLst xmlns:p14="http://schemas.microsoft.com/office/powerpoint/2010/main">
-        <p14:section name="Apertura" id="{d294b48a-4b1f-f2e8-78f3-031df2268495}">
+        <p14:section name="Apertura" id="{2626a70d-4fb0-5d4f-64d7-dce342941893}">
           <p14:sldIdLst>
             <p14:sldId id="256"/>
             <p14:sldId id="257"/>
           </p14:sldIdLst>
         </p14:section>
-        <p14:section name="Periferiche e controller" id="{c955d170-a785-4c48-df9d-93769aadef81}">
+        <p14:section name="Periferiche e controller" id="{050daab4-7be8-e99a-27eb-80275e51615a}">
           <p14:sldIdLst>
             <p14:sldId id="258"/>
             <p14:sldId id="259"/>
           </p14:sldIdLst>
         </p14:section>
-        <p14:section name="I bus" id="{983b7f39-e774-0d34-55b0-1f2ce9ef5bef}">
+        <p14:section name="I bus" id="{98427fbb-dded-5142-d2a6-9bf06aeddac4}">
           <p14:sldIdLst>
             <p14:sldId id="260"/>
             <p14:sldId id="261"/>
             <p14:sldId id="262"/>
           </p14:sldIdLst>
         </p14:section>
-        <p14:section name="La scheda video" id="{b33a79f8-1cc7-0146-d024-b12ec41ba876}">
+        <p14:section name="La scheda video" id="{537f78bc-5b35-6dc1-e7f9-bbc46a06e6a5}">
           <p14:sldIdLst>
             <p14:sldId id="263"/>
             <p14:sldId id="264"/>
@@ -156,7 +156,7 @@
             <p14:sldId id="269"/>
           </p14:sldIdLst>
         </p14:section>
-        <p14:section name="GPU e GPGPU" id="{b4c9aa24-060f-387e-f303-487978caec08}">
+        <p14:section name="GPU e GPGPU" id="{e4b2f474-2207-c61a-3ee9-1e293ab6e52c}">
           <p14:sldIdLst>
             <p14:sldId id="270"/>
             <p14:sldId id="271"/>
@@ -3293,7 +3293,63 @@
       </p:sp>
       <p:sp>
         <p:nvSpPr>
-          <p:cNvPr id="12" name="Shape 10"/>
+          <p:cNvPr id="12" name="Text 10"/>
+          <p:cNvSpPr txBox="1"/>
+          <p:nvPr/>
+        </p:nvSpPr>
+        <p:spPr>
+          <a:xfrm>
+            <a:off x="4693615" y="566928"/>
+            <a:ext cx="6949440" cy="640080"/>
+          </a:xfrm>
+          <a:prstGeom prst="rect">
+            <a:avLst/>
+          </a:prstGeom>
+          <a:noFill/>
+          <a:ln/>
+        </p:spPr>
+        <p:txBody>
+          <a:bodyPr wrap="square" lIns="0" tIns="0" rIns="0" bIns="0" rtlCol="0" anchor="t"/>
+          <a:lstStyle/>
+          <a:p>
+            <a:pPr algn="r" indent="0" marL="0">
+              <a:buNone/>
+            </a:pPr>
+            <a:r>
+              <a:rPr lang="en-US" sz="1300" dirty="0">
+                <a:solidFill>
+                  <a:srgbClr val="CFE3EA"/>
+                </a:solidFill>
+                <a:latin typeface="Calibri" pitchFamily="34" charset="0"/>
+                <a:ea typeface="Calibri" pitchFamily="34" charset="-122"/>
+                <a:cs typeface="Calibri" pitchFamily="34" charset="-120"/>
+              </a:rPr>
+              <a:t>Presentazione della lezione. I listati, il programma completo e come provarlo sono nella presentazione del codice:</a:t>
+            </a:r>
+            <a:endParaRPr lang="en-US" sz="1300" dirty="0"/>
+          </a:p>
+          <a:p>
+            <a:pPr algn="r" indent="0" marL="0">
+              <a:buNone/>
+            </a:pPr>
+            <a:r>
+              <a:rPr lang="en-US" sz="1300" dirty="0">
+                <a:solidFill>
+                  <a:srgbClr val="CFE3EA"/>
+                </a:solidFill>
+                <a:latin typeface="Calibri" pitchFamily="34" charset="0"/>
+                <a:ea typeface="Calibri" pitchFamily="34" charset="-122"/>
+                <a:cs typeface="Calibri" pitchFamily="34" charset="-120"/>
+              </a:rPr>
+              <a:t>20-Architettura_dei_Calcolatori-Scheda_Video-Codice.pptx</a:t>
+            </a:r>
+            <a:endParaRPr lang="en-US" sz="1300" dirty="0"/>
+          </a:p>
+        </p:txBody>
+      </p:sp>
+      <p:sp>
+        <p:nvSpPr>
+          <p:cNvPr id="13" name="Shape 11"/>
           <p:cNvSpPr/>
           <p:nvPr/>
         </p:nvSpPr>
@@ -3320,7 +3376,7 @@
       </p:sp>
       <p:pic>
         <p:nvPicPr>
-          <p:cNvPr id="13" name="Image 0" descr="/Users/raffaelemontella/devel/riscv-prg32/computer-architecture-with-prg32/tools/assets/game_raycaster.png">    </p:cNvPr>
+          <p:cNvPr id="14" name="Image 0" descr="/Users/raffaelemontella/devel/riscv-prg32/computer-architecture-with-prg32/tools/assets/game_raycaster.png">    </p:cNvPr>
           <p:cNvPicPr>
             <a:picLocks noChangeAspect="1"/>
           </p:cNvPicPr>
@@ -11445,8 +11501,8 @@
         </p:blipFill>
         <p:spPr>
           <a:xfrm>
-            <a:off x="6766560" y="2048154"/>
-            <a:ext cx="4876495" cy="3036012"/>
+            <a:off x="6766560" y="2265761"/>
+            <a:ext cx="4876495" cy="2600797"/>
           </a:xfrm>
           <a:prstGeom prst="rect">
             <a:avLst/>

--- a/it/slides/20-Architettura_dei_Calcolatori-Scheda_Video.pptx
+++ b/it/slides/20-Architettura_dei_Calcolatori-Scheda_Video.pptx
@@ -126,26 +126,26 @@
   <p:extLst>
     <p:ext uri="{521415D9-36F7-43E2-AB2F-B90AF26B5E84}">
       <p14:sectionLst xmlns:p14="http://schemas.microsoft.com/office/powerpoint/2010/main">
-        <p14:section name="Apertura" id="{2626a70d-4fb0-5d4f-64d7-dce342941893}">
+        <p14:section name="Apertura" id="{846b3f2d-23bc-b449-4715-27e1ac0a5c52}">
           <p14:sldIdLst>
             <p14:sldId id="256"/>
             <p14:sldId id="257"/>
           </p14:sldIdLst>
         </p14:section>
-        <p14:section name="Periferiche e controller" id="{050daab4-7be8-e99a-27eb-80275e51615a}">
+        <p14:section name="Periferiche e controller" id="{0458d1e9-59ad-d82e-aab2-f292cd7fe39a}">
           <p14:sldIdLst>
             <p14:sldId id="258"/>
             <p14:sldId id="259"/>
           </p14:sldIdLst>
         </p14:section>
-        <p14:section name="I bus" id="{98427fbb-dded-5142-d2a6-9bf06aeddac4}">
+        <p14:section name="I bus" id="{6e7de2d2-491a-769b-b71e-2d4a0a37ff14}">
           <p14:sldIdLst>
             <p14:sldId id="260"/>
             <p14:sldId id="261"/>
             <p14:sldId id="262"/>
           </p14:sldIdLst>
         </p14:section>
-        <p14:section name="La scheda video" id="{537f78bc-5b35-6dc1-e7f9-bbc46a06e6a5}">
+        <p14:section name="La scheda video" id="{d52362a0-a25a-2e48-c299-2618b395fd37}">
           <p14:sldIdLst>
             <p14:sldId id="263"/>
             <p14:sldId id="264"/>
@@ -156,7 +156,7 @@
             <p14:sldId id="269"/>
           </p14:sldIdLst>
         </p14:section>
-        <p14:section name="GPU e GPGPU" id="{e4b2f474-2207-c61a-3ee9-1e293ab6e52c}">
+        <p14:section name="GPU e GPGPU" id="{140802bd-7341-76e7-a361-b50c99198b24}">
           <p14:sldIdLst>
             <p14:sldId id="270"/>
             <p14:sldId id="271"/>
@@ -571,6 +571,8 @@
             <a:r>
               <a:rPr lang="en-US" dirty="0"/>
               <a:t>Con questa lezione il corso lascia il processore e si rivolge a ciò che lo circonda. L'argomento è il percorso di un'immagine: da un numero in memoria a un punto di luce sullo schermo. Lungo la strada incontrate due idee generali, il controller di una periferica e il bus, e una macchina specifica, la scheda video, con il suo processore, la GPU. Il kit non ha alcuna scheda video, ed è un vantaggio: ogni passaggio che una scheda nasconderebbe è svolto da codice che potete leggere.
+Stato di apprendimento: DA COMPRENDERE OGGI, alla fine di questa lezione lo spiegate, lo seguite passo passo e lo applicate da soli; DA UTILIZZARE OGGI, oggi seguite e usate la ricetta; come funziona dentro si spiega più avanti, o non fa parte del corso; DA COMPRENDERE PIÙ AVANTI, riconoscete il nome e lo scopo; lo spiega una lezione successiva. Una slide senza etichetta è contesto: una storia, un esempio, una domanda, un esercizio.
+Stato di apprendimento di questa lezione. DA COMPRENDERE OGGI: il frame buffer; i controllori delle periferiche; bus e banda; la scheda video; GPU e GPGPU. DA UTILIZZARE OGGI: il programma completo, gli strumenti di PRG32 (si usa, non si studia, in questo corso). DA COMPRENDERE PIÙ AVANTI: niente. Una slide senza etichetta è contesto: una storia, un esempio, una domanda, un esercizio.
 Per il docente: Spirale: su PRG32 una chiamata disegna un pixel; la lezione segue quel pixel dal frame buffer al display, poi generalizza a bus, schede video, GPU e GPGPU. Il kit non ha una scheda video: fa tutto il suo processore, e questo rende visibile ogni passaggio.</a:t>
             </a:r>
             <a:endParaRPr lang="en-US" dirty="0"/>
@@ -660,6 +662,7 @@
             <a:r>
               <a:rPr lang="en-US" dirty="0"/>
               <a:t>Le uscite, in ordine di tempo. VGA, analogica, per i monitor a tubo catodico. DVI, la prima uscita digitale, arrivata con i monitor LCD. HDMI, digitale, che porta anche l'audio. DisplayPort, digitale, che viaggia anche sui connettori USB-C. L'ultima riga è il kit: il display si raggiunge attraverso un bus SPI, e il chip sul modulo del display, un ILI9341, fa la parte dell'elettronica del monitor per un pannello di 320 per 240 pixel.
+DA COMPRENDERE OGGI: la scheda video.
 Per il docente: High-Definition Multimedia Interface; Digital Visual Interface; Video Graphics Array. L'ILI9341 è il chip sul modulo del display: ha una memoria propria per il frame e pilota i cristalli liquidi (Lezione 21).</a:t>
             </a:r>
             <a:endParaRPr lang="en-US" dirty="0"/>
@@ -749,6 +752,7 @@
             <a:r>
               <a:rPr lang="en-US" dirty="0"/>
               <a:t>La risoluzione è la dimensione della griglia di pixel, colonne per righe. La tabella va da 320 per 200, 64.000 pixel, la risoluzione del Commodore 64 e del viewport di PRG32, al 4K con più di otto milioni. La terza colonna è il rapporto d'aspetto: il tradizionale 4:3 ha lasciato il posto al 16:9. La risoluzione determina la definizione dell'immagine, e anche quanti pixel vanno memorizzati e inviati per ogni frame.
+DA COMPRENDERE OGGI: la scheda video.
 Per il docente: La tabella della presentazione originale elencava anche 800 x 600, 1280 x 1024 (5:4) e 1600 x 1200. Il tradizionale rapporto 4:3 ha lasciato il posto al panoramico 16:9. La riga 4K è nuova.</a:t>
             </a:r>
             <a:endParaRPr lang="en-US" dirty="0"/>
@@ -838,6 +842,7 @@
             <a:r>
               <a:rPr lang="en-US" dirty="0"/>
               <a:t>La profondità di colore è il numero di bit per pixel. Con 4 bit ci sono 16 colori; con 8 bit, 256, e ogni valore di solito è un indice in una tabella di colori, la palette; con 16 bit, 65.536, nel formato RGB565 che conoscete; con 24 bit, più di sedici milioni, 256 sfumature per ogni primario. La memoria per un frame è pixel per byte per pixel. PRG32 usa insieme le due righe centrali: un frame buffer a 8 bit di indici e una palette di 256 colori RGB565.
+DA COMPRENDERE OGGI: la scheda video.
 Per il docente: In True Color ogni colore si ottiene da 256 sfumature di ciascuno dei tre primari additivi. PRG32 usa entrambe le righe centrali: un frame buffer a 8 bit di indici di palette, e una palette di 256 colori RGB565 (Lezione 04).</a:t>
             </a:r>
             <a:endParaRPr lang="en-US" dirty="0"/>
@@ -927,6 +932,7 @@
             <a:r>
               <a:rPr lang="en-US" dirty="0"/>
               <a:t>Il percorso del pixel sul kit, in cinque blocchi: il vostro codice, il frame buffer in RAM, la palette che trasforma un indice in un colore, il bus SPI, il display. La tabella fa i conti. Un frame a un byte per pixel sono 64.000 byte; a due byte sarebbe un quarto della RAM del chip. Sul bus ogni pixel viaggia come 16 bit: circa un milione di bit per frame, 38 millisecondi a 27 MHz. Da qui le due risposte ingegneristiche: un frame buffer indicizzato, e inviare solo ciò che è cambiato.
+DA COMPRENDERE OGGI: il frame buffer.
 Per il docente: Dati dal repository PRG32 (docs/hardware/ili9341.md): frame buffer indicizzato a 8 bit di 64.000 byte, palette di 512 byte, clock SPI predefinito di 27 MHz, trasferimenti in DMA e tracciamento dei rettangoli modificati. 1.024.000 / 27.000.000 = 37,9 ms. Il contatore di FPS delle cartucce dimostrative mostra il risultato.</a:t>
             </a:r>
             <a:endParaRPr lang="en-US" dirty="0"/>
@@ -1016,6 +1022,7 @@
             <a:r>
               <a:rPr lang="en-US" dirty="0"/>
               <a:t>Gli stessi conti, alla scala di un PC, spiegano la storia dell'hardware video. Più definizione significa più memoria per ogni frame, e il flusso di dati verso la scheda rischia di saturare il bus. Le due risposte sono state più memoria sulla scheda stessa, e un bus più largo o dedicato: prima AGP, oggi PCI Express. La cifra a destra dà la scala: uno schermo 4K a 60 frame al secondo è circa un gigabyte e mezzo di pixel ogni secondo.
+DA COMPRENDERE OGGI: la scheda video.
 Per il docente: Con AGP il processore grafico usava parte della memoria centrale con accesso diretto. PCI Express (2004) l'ha sostituito con più banda e più potenza. SLI (NVIDIA) e CrossFire (AMD) collegavano fino a quattro schede; oggi la regola è una sola scheda, oppure molte schede in un server.</a:t>
             </a:r>
             <a:endParaRPr lang="en-US" dirty="0"/>
@@ -1105,6 +1112,7 @@
             <a:r>
               <a:rPr lang="en-US" dirty="0"/>
               <a:t>Con il diffondersi delle interfacce grafiche, calcolare immagini ha occupato una quota crescente del tempo di processore. Per alleggerire la CPU, le schede video hanno ricevuto processori dedicati: le unità di elaborazione grafica, GPU. Accelerano le operazioni raster, come la copia di blocchi di pixel, e la grafica 3D: trasformazioni, texture, illuminazione. I programmi le raggiungono tramite librerie, e un driver di periferica adatta il software alle primitive di ogni GPU. Sul kit non c'è una GPU: un rettangolo è un ciclo di store eseguito dal core RISC-V, e ne potete vedere il costo.
+DA COMPRENDERE OGGI: GPU e GPGPU.
 Per il docente: Su PRG32 non c'è una GPU: prg32_gfx_rect è un ciclo di istruzioni di store eseguite dal core RISC-V. Per questo la frequenza dei frame di una cartuccia impegnativa cala, e gli studenti possono vedere il costo di ogni pixel.</a:t>
             </a:r>
             <a:endParaRPr lang="en-US" dirty="0"/>
@@ -1194,6 +1202,7 @@
             <a:r>
               <a:rPr lang="en-US" dirty="0"/>
               <a:t>Una GPU applica la stessa operazione, in parallelo, a intere matrici di pixel. Nulla obbliga quei numeri a essere pixel: il GPGPU è l'uso dei processori grafici per il calcolo generico. Una GPU ha un numero molto grande di core semplici, e si programma con modelli come CUDA e OpenCL. Simulazione scientifica, analisi dei dati e, oggi soprattutto, addestramento e uso delle reti neurali girano su GPU. La figura richiama la somma parallela della Lezione 04: la stessa operazione su molti dati insieme.
+DA COMPRENDERE OGGI: GPU e GPGPU.
 Per il docente: Compute Unified Device Architecture. La somma parallela della Lezione 04 è il più semplice esempio di GPGPU. I modelli meteorologici e marini del Dipartimento girano su cluster di GPU.</a:t>
             </a:r>
             <a:endParaRPr lang="en-US" dirty="0"/>
@@ -1641,6 +1650,7 @@
             <a:r>
               <a:rPr lang="en-US" dirty="0"/>
               <a:t>Cinque conclusioni. I dispositivi di ingresso/uscita sono una parte fondamentale di un calcolatore. Ciascuno è gestito da un controller che lo interfaccia al bus. Un bus è caratterizzato da larghezza, velocità e velocità di trasferimento, e la sua banda è un limite di cui il progetto deve tenere conto. Una scheda video visualizza grafica e testo: un frame buffer, una risoluzione, una profondità di colore, un'uscita. E i suoi processori, le GPU, si usano oggi per il calcolo ad alte prestazioni. La prossima lezione tratta gli altri dispositivi di ingresso e di uscita.
+Stato di apprendimento, riepilogo. DA COMPRENDERE OGGI: il frame buffer; i controllori delle periferiche; bus e banda; la scheda video; GPU e GPGPU. DA UTILIZZARE OGGI: il programma completo, gli strumenti di PRG32 (si usa, non si studia, in questo corso). DA COMPRENDERE PIÙ AVANTI: niente. Una slide senza etichetta è contesto: una storia, un esempio, una domanda, un esercizio.
 Per il docente: Prossima lezione: i dispositivi di ingresso e di uscita.</a:t>
             </a:r>
             <a:endParaRPr lang="en-US" dirty="0"/>
@@ -1730,6 +1740,7 @@
             <a:r>
               <a:rPr lang="en-US" dirty="0"/>
               <a:t>Le periferiche servono all'interazione tra l'utente e il sistema. Hanno un'autonomia limitata: il processore le controlla e le coordina. E lavorano in modo asincrono, al proprio ritmo, quindi servono meccanismi di sincronizzazione: per sapere quando è disponibile un dato in ingresso, e quando un dispositivo di uscita ha finito. Il terminale, lo strumento di interazione più comune, è in realtà due dispositivi indipendenti, una tastiera e un video; è il processore a copiare sul video ciò che arriva dalla tastiera.
+DA COMPRENDERE OGGI: i controllori delle periferiche.
 Per il docente: Tastiera e video non sono collegati direttamente: è il processore a riprodurre sul video ciò che arriva dalla tastiera (Lezione 21).</a:t>
             </a:r>
             <a:endParaRPr lang="en-US" dirty="0"/>
@@ -1819,6 +1830,7 @@
             <a:r>
               <a:rPr lang="en-US" dirty="0"/>
               <a:t>Una periferica non è mai collegata direttamente al processore: in mezzo c'è un controller. Guardate lo schema: il processore e la memoria stanno sul bus, e così i controller; ogni controller ha il proprio dispositivo dall'altra parte. Il controller gestisce il dialogo con il dispositivo e presenta sul bus pochi registri, che il processore legge e scrive come memoria. Quando un'operazione termina, di solito alza un'interruzione, come nella lezione precedente. La scheda video è il controller del monitor.
+DA COMPRENDERE OGGI: i controllori delle periferiche.
 Per il docente: Sull'ESP32-C6 i controller (SPI, I2S, GPIO, USB) stanno sullo stesso chip del processore, e i loro registri sono mappati in memoria (Lezione 15).</a:t>
             </a:r>
             <a:endParaRPr lang="en-US" dirty="0"/>
@@ -1908,6 +1920,7 @@
             <a:r>
               <a:rPr lang="en-US" dirty="0"/>
               <a:t>Un bus è un canale di comunicazione condiviso da più unità, e le sue caratteristiche decidono le prestazioni dell'intero sistema. La sua larghezza è il numero di bit del bus dati. La sua velocità è la frequenza a cui lavora. Il loro prodotto è la velocità di trasferimento: un bus a 32 bit a 66 MHz porta 4 byte 66 milioni di volte al secondo, 264 megabyte al secondo. Un bus è anche uno standard: segnali, connettori e un protocollo su cui tutte le unità concordano.
+DA COMPRENDERE OGGI: bus e banda.
 Per il docente: L'esempio è il bus PCI: 4 byte x 66 milioni di cicli al secondo = 264 MB/s. Interfaccia: il modulo hardware che codifica i dati in forma elettrica o ottica. Protocollo: la descrizione di livello più alto di come si svolge il dialogo.</a:t>
             </a:r>
             <a:endParaRPr lang="en-US" dirty="0"/>
@@ -1996,7 +2009,8 @@
           <a:p>
             <a:r>
               <a:rPr lang="en-US" dirty="0"/>
-              <a:t>Perché i bus, e che cosa costano. I vantaggi: si aggiungono facilmente nuovi dispositivi; una periferica può passare a un altro calcolatore con lo stesso bus; un solo insieme di fili collega molte periferiche; il costo per byte è basso. Gli svantaggi: la banda del bus limita la velocità di trasferimento; la velocità massima cala quando il bus si allunga e quando i dispositivi collegati aumentano; e, essendo condiviso, il bus porta un solo trasferimento alla volta.</a:t>
+              <a:t>Perché i bus, e che cosa costano. I vantaggi: si aggiungono facilmente nuovi dispositivi; una periferica può passare a un altro calcolatore con lo stesso bus; un solo insieme di fili collega molte periferiche; il costo per byte è basso. Gli svantaggi: la banda del bus limita la velocità di trasferimento; la velocità massima cala quando il bus si allunga e quando i dispositivi collegati aumentano; e, essendo condiviso, il bus porta un solo trasferimento alla volta.
+DA COMPRENDERE OGGI: bus e banda.</a:t>
             </a:r>
             <a:endParaRPr lang="en-US" dirty="0"/>
           </a:p>
@@ -2085,6 +2099,7 @@
             <a:r>
               <a:rPr lang="en-US" dirty="0"/>
               <a:t>Quarant'anni di bus in una tabella. Leggetela per colonne. I primi bus, ISA, PCI, AGP per la sola scheda video, IDE e SCSI per i dischi, erano paralleli: molti fili affiancati. I loro successori, PCI Express, Serial ATA, USB, sono seriali: pochi fili, molto più veloci. È la lezione della Lezione 14. L'ultima riga è il kit: SPI, I2C e I2S sono i piccoli bus seriali che collegano i chip sulla stessa scheda.
+DA COMPRENDERE OGGI: bus e banda.
 Per il docente: USB: universal serial bus. PCI: peripheral component interconnect. AGP: accelerated graphics port. IDE: integrated device electronics. ISA: industry standard architecture. SCSI: small computer system interface. Nell'elenco originale c'erano anche PCMCIA e FireWire. Il passaggio dal parallelo al seriale è la lezione della Lezione 14.</a:t>
             </a:r>
             <a:endParaRPr lang="en-US" dirty="0"/>
@@ -2174,6 +2189,7 @@
             <a:r>
               <a:rPr lang="en-US" dirty="0"/>
               <a:t>La funzione di una scheda video è inviare al monitor le informazioni da visualizzare. Traduce la rappresentazione dell'immagine prodotta dal processore in una forma che il monitor può mostrare. Ha una memoria propria, la memoria video, che conserva il frame: il frame buffer. Ogni volta che lo schermo viene ridisegnato, la scheda legge quella memoria e invia il segnale per il colore di ogni pixel. E ha una capacità di elaborazione propria, che l'ultima parte della lezione esamina.
+DA COMPRENDERE OGGI: la scheda video.
 Per il docente: DAC: convertitore digitale-analogico, necessario per i monitor analogici. Su PRG32 la «scheda video» è una regione di RAM più la periferica SPI: nessun hardware separato.</a:t>
             </a:r>
             <a:endParaRPr lang="en-US" dirty="0"/>
@@ -2263,6 +2279,7 @@
             <a:r>
               <a:rPr lang="en-US" dirty="0"/>
               <a:t>Due generazioni di monitor. Un monitor a tubo catodico ha un ingresso analogico: la scheda deve convertire l'immagine digitale in segnali analogici con un componente detto RAMDAC, e lungo il cavo entrano rumore e distorsione. Un monitor a cristalli liquidi ha un ingresso digitale: la scheda adatta colori e risoluzione, e ogni pixel dell'uscita corrisponde esattamente a un pixel dello schermo. La conversione in analogico, con i suoi difetti, scompare.
+DA COMPRENDERE OGGI: la scheda video.
 Per il docente: RAMDAC: random access memory digital-analog converter. Il DVI poteva portare anche i segnali analogici VGA, per compatibilità.</a:t>
             </a:r>
             <a:endParaRPr lang="en-US" dirty="0"/>
@@ -3400,6 +3417,420 @@
       </p:pic>
       <p:sp>
         <p:nvSpPr>
+          <p:cNvPr id="15" name="Shape 12"/>
+          <p:cNvSpPr/>
+          <p:nvPr/>
+        </p:nvSpPr>
+        <p:spPr>
+          <a:xfrm>
+            <a:off x="8910777" y="91440"/>
+            <a:ext cx="2732278" cy="274320"/>
+          </a:xfrm>
+          <a:prstGeom prst="rect">
+            <a:avLst/>
+          </a:prstGeom>
+          <a:solidFill>
+            <a:srgbClr val="F3E8FF"/>
+          </a:solidFill>
+          <a:ln w="12700">
+            <a:solidFill>
+              <a:srgbClr val="7E22CE"/>
+            </a:solidFill>
+            <a:prstDash val="dash"/>
+          </a:ln>
+        </p:spPr>
+      </p:sp>
+      <p:sp>
+        <p:nvSpPr>
+          <p:cNvPr id="16" name="Shape 13"/>
+          <p:cNvSpPr/>
+          <p:nvPr/>
+        </p:nvSpPr>
+        <p:spPr>
+          <a:xfrm>
+            <a:off x="8938209" y="128016"/>
+            <a:ext cx="45720" cy="45720"/>
+          </a:xfrm>
+          <a:prstGeom prst="rect">
+            <a:avLst/>
+          </a:prstGeom>
+          <a:solidFill>
+            <a:srgbClr val="7E22CE"/>
+          </a:solidFill>
+          <a:ln w="12700">
+            <a:solidFill>
+              <a:srgbClr val="7E22CE"/>
+            </a:solidFill>
+            <a:prstDash val="solid"/>
+          </a:ln>
+        </p:spPr>
+      </p:sp>
+      <p:sp>
+        <p:nvSpPr>
+          <p:cNvPr id="17" name="Shape 14"/>
+          <p:cNvSpPr/>
+          <p:nvPr/>
+        </p:nvSpPr>
+        <p:spPr>
+          <a:xfrm>
+            <a:off x="8938209" y="205740"/>
+            <a:ext cx="45720" cy="45720"/>
+          </a:xfrm>
+          <a:prstGeom prst="rect">
+            <a:avLst/>
+          </a:prstGeom>
+          <a:solidFill>
+            <a:srgbClr val="7E22CE"/>
+          </a:solidFill>
+          <a:ln w="12700">
+            <a:solidFill>
+              <a:srgbClr val="7E22CE"/>
+            </a:solidFill>
+            <a:prstDash val="solid"/>
+          </a:ln>
+        </p:spPr>
+      </p:sp>
+      <p:sp>
+        <p:nvSpPr>
+          <p:cNvPr id="18" name="Shape 15"/>
+          <p:cNvSpPr/>
+          <p:nvPr/>
+        </p:nvSpPr>
+        <p:spPr>
+          <a:xfrm>
+            <a:off x="8938209" y="283464"/>
+            <a:ext cx="45720" cy="45720"/>
+          </a:xfrm>
+          <a:prstGeom prst="rect">
+            <a:avLst/>
+          </a:prstGeom>
+          <a:solidFill>
+            <a:srgbClr val="7E22CE"/>
+          </a:solidFill>
+          <a:ln w="12700">
+            <a:solidFill>
+              <a:srgbClr val="7E22CE"/>
+            </a:solidFill>
+            <a:prstDash val="solid"/>
+          </a:ln>
+        </p:spPr>
+      </p:sp>
+      <p:pic>
+        <p:nvPicPr>
+          <p:cNvPr id="19" name="Image 1" descr="preencoded.png">    </p:cNvPr>
+          <p:cNvPicPr>
+            <a:picLocks noChangeAspect="1"/>
+          </p:cNvPicPr>
+          <p:nvPr/>
+        </p:nvPicPr>
+        <p:blipFill>
+          <a:blip r:embed="rId2"/>
+          <a:stretch>
+            <a:fillRect/>
+          </a:stretch>
+        </p:blipFill>
+        <p:spPr>
+          <a:xfrm>
+            <a:off x="9038793" y="128016"/>
+            <a:ext cx="201168" cy="201168"/>
+          </a:xfrm>
+          <a:prstGeom prst="rect">
+            <a:avLst/>
+          </a:prstGeom>
+        </p:spPr>
+      </p:pic>
+      <p:sp>
+        <p:nvSpPr>
+          <p:cNvPr id="20" name="Text 16"/>
+          <p:cNvSpPr txBox="1"/>
+          <p:nvPr/>
+        </p:nvSpPr>
+        <p:spPr>
+          <a:xfrm>
+            <a:off x="9294825" y="91440"/>
+            <a:ext cx="2311654" cy="274320"/>
+          </a:xfrm>
+          <a:prstGeom prst="rect">
+            <a:avLst/>
+          </a:prstGeom>
+          <a:noFill/>
+          <a:ln/>
+        </p:spPr>
+        <p:txBody>
+          <a:bodyPr wrap="square" lIns="0" tIns="0" rIns="0" bIns="0" rtlCol="0" anchor="ctr"/>
+          <a:lstStyle/>
+          <a:p>
+            <a:pPr indent="0" marL="0">
+              <a:buNone/>
+            </a:pPr>
+            <a:r>
+              <a:rPr lang="en-US" sz="1100" b="1" dirty="0">
+                <a:solidFill>
+                  <a:srgbClr val="6B21A8"/>
+                </a:solidFill>
+                <a:latin typeface="Calibri" pitchFamily="34" charset="0"/>
+                <a:ea typeface="Calibri" pitchFamily="34" charset="-122"/>
+                <a:cs typeface="Calibri" pitchFamily="34" charset="-120"/>
+              </a:rPr>
+              <a:t>DA COMPRENDERE PIÙ AVANTI</a:t>
+            </a:r>
+            <a:endParaRPr lang="en-US" sz="1100" dirty="0"/>
+          </a:p>
+        </p:txBody>
+      </p:sp>
+      <p:sp>
+        <p:nvSpPr>
+          <p:cNvPr id="21" name="Shape 17"/>
+          <p:cNvSpPr/>
+          <p:nvPr/>
+        </p:nvSpPr>
+        <p:spPr>
+          <a:xfrm>
+            <a:off x="6675069" y="91440"/>
+            <a:ext cx="2125980" cy="274320"/>
+          </a:xfrm>
+          <a:prstGeom prst="rect">
+            <a:avLst/>
+          </a:prstGeom>
+          <a:solidFill>
+            <a:srgbClr val="FEF3C7"/>
+          </a:solidFill>
+          <a:ln w="12700">
+            <a:solidFill>
+              <a:srgbClr val="B45309"/>
+            </a:solidFill>
+            <a:prstDash val="solid"/>
+          </a:ln>
+        </p:spPr>
+      </p:sp>
+      <p:sp>
+        <p:nvSpPr>
+          <p:cNvPr id="22" name="Shape 18"/>
+          <p:cNvSpPr/>
+          <p:nvPr/>
+        </p:nvSpPr>
+        <p:spPr>
+          <a:xfrm>
+            <a:off x="6675069" y="91440"/>
+            <a:ext cx="27432" cy="274320"/>
+          </a:xfrm>
+          <a:prstGeom prst="rect">
+            <a:avLst/>
+          </a:prstGeom>
+          <a:solidFill>
+            <a:srgbClr val="B45309"/>
+          </a:solidFill>
+          <a:ln w="12700">
+            <a:solidFill>
+              <a:srgbClr val="B45309"/>
+            </a:solidFill>
+            <a:prstDash val="solid"/>
+          </a:ln>
+        </p:spPr>
+      </p:sp>
+      <p:sp>
+        <p:nvSpPr>
+          <p:cNvPr id="23" name="Shape 19"/>
+          <p:cNvSpPr/>
+          <p:nvPr/>
+        </p:nvSpPr>
+        <p:spPr>
+          <a:xfrm>
+            <a:off x="6729933" y="91440"/>
+            <a:ext cx="27432" cy="274320"/>
+          </a:xfrm>
+          <a:prstGeom prst="rect">
+            <a:avLst/>
+          </a:prstGeom>
+          <a:solidFill>
+            <a:srgbClr val="B45309"/>
+          </a:solidFill>
+          <a:ln w="12700">
+            <a:solidFill>
+              <a:srgbClr val="B45309"/>
+            </a:solidFill>
+            <a:prstDash val="solid"/>
+          </a:ln>
+        </p:spPr>
+      </p:sp>
+      <p:pic>
+        <p:nvPicPr>
+          <p:cNvPr id="24" name="Image 2" descr="preencoded.png">    </p:cNvPr>
+          <p:cNvPicPr>
+            <a:picLocks noChangeAspect="1"/>
+          </p:cNvPicPr>
+          <p:nvPr/>
+        </p:nvPicPr>
+        <p:blipFill>
+          <a:blip r:embed="rId3"/>
+          <a:stretch>
+            <a:fillRect/>
+          </a:stretch>
+        </p:blipFill>
+        <p:spPr>
+          <a:xfrm>
+            <a:off x="6803085" y="128016"/>
+            <a:ext cx="201168" cy="201168"/>
+          </a:xfrm>
+          <a:prstGeom prst="rect">
+            <a:avLst/>
+          </a:prstGeom>
+        </p:spPr>
+      </p:pic>
+      <p:sp>
+        <p:nvSpPr>
+          <p:cNvPr id="25" name="Text 20"/>
+          <p:cNvSpPr txBox="1"/>
+          <p:nvPr/>
+        </p:nvSpPr>
+        <p:spPr>
+          <a:xfrm>
+            <a:off x="7059117" y="91440"/>
+            <a:ext cx="1705356" cy="274320"/>
+          </a:xfrm>
+          <a:prstGeom prst="rect">
+            <a:avLst/>
+          </a:prstGeom>
+          <a:noFill/>
+          <a:ln/>
+        </p:spPr>
+        <p:txBody>
+          <a:bodyPr wrap="square" lIns="0" tIns="0" rIns="0" bIns="0" rtlCol="0" anchor="ctr"/>
+          <a:lstStyle/>
+          <a:p>
+            <a:pPr indent="0" marL="0">
+              <a:buNone/>
+            </a:pPr>
+            <a:r>
+              <a:rPr lang="en-US" sz="1100" b="1" dirty="0">
+                <a:solidFill>
+                  <a:srgbClr val="92400E"/>
+                </a:solidFill>
+                <a:latin typeface="Calibri" pitchFamily="34" charset="0"/>
+                <a:ea typeface="Calibri" pitchFamily="34" charset="-122"/>
+                <a:cs typeface="Calibri" pitchFamily="34" charset="-120"/>
+              </a:rPr>
+              <a:t>DA UTILIZZARE OGGI</a:t>
+            </a:r>
+            <a:endParaRPr lang="en-US" sz="1100" dirty="0"/>
+          </a:p>
+        </p:txBody>
+      </p:sp>
+      <p:sp>
+        <p:nvSpPr>
+          <p:cNvPr id="26" name="Shape 21"/>
+          <p:cNvSpPr/>
+          <p:nvPr/>
+        </p:nvSpPr>
+        <p:spPr>
+          <a:xfrm>
+            <a:off x="4352747" y="91440"/>
+            <a:ext cx="2212594" cy="274320"/>
+          </a:xfrm>
+          <a:prstGeom prst="rect">
+            <a:avLst/>
+          </a:prstGeom>
+          <a:solidFill>
+            <a:srgbClr val="E0F2FE"/>
+          </a:solidFill>
+          <a:ln w="12700">
+            <a:solidFill>
+              <a:srgbClr val="0369A1"/>
+            </a:solidFill>
+            <a:prstDash val="solid"/>
+          </a:ln>
+        </p:spPr>
+      </p:sp>
+      <p:sp>
+        <p:nvSpPr>
+          <p:cNvPr id="27" name="Shape 22"/>
+          <p:cNvSpPr/>
+          <p:nvPr/>
+        </p:nvSpPr>
+        <p:spPr>
+          <a:xfrm>
+            <a:off x="4352747" y="91440"/>
+            <a:ext cx="73152" cy="274320"/>
+          </a:xfrm>
+          <a:prstGeom prst="rect">
+            <a:avLst/>
+          </a:prstGeom>
+          <a:solidFill>
+            <a:srgbClr val="0369A1"/>
+          </a:solidFill>
+          <a:ln w="12700">
+            <a:solidFill>
+              <a:srgbClr val="0369A1"/>
+            </a:solidFill>
+            <a:prstDash val="solid"/>
+          </a:ln>
+        </p:spPr>
+      </p:sp>
+      <p:pic>
+        <p:nvPicPr>
+          <p:cNvPr id="28" name="Image 3" descr="preencoded.png">    </p:cNvPr>
+          <p:cNvPicPr>
+            <a:picLocks noChangeAspect="1"/>
+          </p:cNvPicPr>
+          <p:nvPr/>
+        </p:nvPicPr>
+        <p:blipFill>
+          <a:blip r:embed="rId4"/>
+          <a:stretch>
+            <a:fillRect/>
+          </a:stretch>
+        </p:blipFill>
+        <p:spPr>
+          <a:xfrm>
+            <a:off x="4480763" y="128016"/>
+            <a:ext cx="201168" cy="201168"/>
+          </a:xfrm>
+          <a:prstGeom prst="rect">
+            <a:avLst/>
+          </a:prstGeom>
+        </p:spPr>
+      </p:pic>
+      <p:sp>
+        <p:nvSpPr>
+          <p:cNvPr id="29" name="Text 23"/>
+          <p:cNvSpPr txBox="1"/>
+          <p:nvPr/>
+        </p:nvSpPr>
+        <p:spPr>
+          <a:xfrm>
+            <a:off x="4736795" y="91440"/>
+            <a:ext cx="1791970" cy="274320"/>
+          </a:xfrm>
+          <a:prstGeom prst="rect">
+            <a:avLst/>
+          </a:prstGeom>
+          <a:noFill/>
+          <a:ln/>
+        </p:spPr>
+        <p:txBody>
+          <a:bodyPr wrap="square" lIns="0" tIns="0" rIns="0" bIns="0" rtlCol="0" anchor="ctr"/>
+          <a:lstStyle/>
+          <a:p>
+            <a:pPr indent="0" marL="0">
+              <a:buNone/>
+            </a:pPr>
+            <a:r>
+              <a:rPr lang="en-US" sz="1100" b="1" dirty="0">
+                <a:solidFill>
+                  <a:srgbClr val="075985"/>
+                </a:solidFill>
+                <a:latin typeface="Calibri" pitchFamily="34" charset="0"/>
+                <a:ea typeface="Calibri" pitchFamily="34" charset="-122"/>
+                <a:cs typeface="Calibri" pitchFamily="34" charset="-120"/>
+              </a:rPr>
+              <a:t>DA COMPRENDERE OGGI</a:t>
+            </a:r>
+            <a:endParaRPr lang="en-US" sz="1100" dirty="0"/>
+          </a:p>
+        </p:txBody>
+      </p:sp>
+      <p:sp>
+        <p:nvSpPr>
           <p:cNvPr id="25" name="Slide Number Placeholder 0"/>
           <p:cNvSpPr>
             <a:spLocks noGrp="1"/>
@@ -5190,6 +5621,133 @@
       </p:graphicFrame>
       <p:sp>
         <p:nvSpPr>
+          <p:cNvPr id="4" name="Shape 1"/>
+          <p:cNvSpPr/>
+          <p:nvPr/>
+        </p:nvSpPr>
+        <p:spPr>
+          <a:xfrm>
+            <a:off x="8248599" y="91440"/>
+            <a:ext cx="3394456" cy="274320"/>
+          </a:xfrm>
+          <a:prstGeom prst="rect">
+            <a:avLst/>
+          </a:prstGeom>
+          <a:solidFill>
+            <a:srgbClr val="E0F2FE"/>
+          </a:solidFill>
+          <a:ln w="12700">
+            <a:solidFill>
+              <a:srgbClr val="0369A1"/>
+            </a:solidFill>
+            <a:prstDash val="solid"/>
+          </a:ln>
+        </p:spPr>
+      </p:sp>
+      <p:sp>
+        <p:nvSpPr>
+          <p:cNvPr id="5" name="Shape 2"/>
+          <p:cNvSpPr/>
+          <p:nvPr/>
+        </p:nvSpPr>
+        <p:spPr>
+          <a:xfrm>
+            <a:off x="8248599" y="91440"/>
+            <a:ext cx="73152" cy="274320"/>
+          </a:xfrm>
+          <a:prstGeom prst="rect">
+            <a:avLst/>
+          </a:prstGeom>
+          <a:solidFill>
+            <a:srgbClr val="0369A1"/>
+          </a:solidFill>
+          <a:ln w="12700">
+            <a:solidFill>
+              <a:srgbClr val="0369A1"/>
+            </a:solidFill>
+            <a:prstDash val="solid"/>
+          </a:ln>
+        </p:spPr>
+      </p:sp>
+      <p:pic>
+        <p:nvPicPr>
+          <p:cNvPr id="6" name="Image 0" descr="preencoded.png">    </p:cNvPr>
+          <p:cNvPicPr>
+            <a:picLocks noChangeAspect="1"/>
+          </p:cNvPicPr>
+          <p:nvPr/>
+        </p:nvPicPr>
+        <p:blipFill>
+          <a:blip r:embed="rId1"/>
+          <a:stretch>
+            <a:fillRect/>
+          </a:stretch>
+        </p:blipFill>
+        <p:spPr>
+          <a:xfrm>
+            <a:off x="8376615" y="128016"/>
+            <a:ext cx="201168" cy="201168"/>
+          </a:xfrm>
+          <a:prstGeom prst="rect">
+            <a:avLst/>
+          </a:prstGeom>
+        </p:spPr>
+      </p:pic>
+      <p:sp>
+        <p:nvSpPr>
+          <p:cNvPr id="7" name="Text 3"/>
+          <p:cNvSpPr txBox="1"/>
+          <p:nvPr/>
+        </p:nvSpPr>
+        <p:spPr>
+          <a:xfrm>
+            <a:off x="8632647" y="91440"/>
+            <a:ext cx="2973832" cy="274320"/>
+          </a:xfrm>
+          <a:prstGeom prst="rect">
+            <a:avLst/>
+          </a:prstGeom>
+          <a:noFill/>
+          <a:ln/>
+        </p:spPr>
+        <p:txBody>
+          <a:bodyPr wrap="square" lIns="0" tIns="0" rIns="0" bIns="0" rtlCol="0" anchor="ctr"/>
+          <a:lstStyle/>
+          <a:p>
+            <a:pPr indent="0" marL="0">
+              <a:buNone/>
+            </a:pPr>
+            <a:r>
+              <a:rPr lang="en-US" sz="1100" b="1" dirty="0">
+                <a:solidFill>
+                  <a:srgbClr val="075985"/>
+                </a:solidFill>
+                <a:latin typeface="Calibri" pitchFamily="34" charset="0"/>
+                <a:ea typeface="Calibri" pitchFamily="34" charset="-122"/>
+                <a:cs typeface="Calibri" pitchFamily="34" charset="-120"/>
+              </a:rPr>
+              <a:t>DA COMPRENDERE OGGI</a:t>
+            </a:r>
+            <a:pPr indent="0" marL="0">
+              <a:buNone/>
+            </a:pPr>
+            <a:r>
+              <a:rPr lang="en-US" sz="1100" dirty="0">
+                <a:solidFill>
+                  <a:srgbClr val="075985"/>
+                </a:solidFill>
+                <a:latin typeface="Calibri" pitchFamily="34" charset="0"/>
+                <a:ea typeface="Calibri" pitchFamily="34" charset="-122"/>
+                <a:cs typeface="Calibri" pitchFamily="34" charset="-120"/>
+              </a:rPr>
+              <a:t> · la scheda video</a:t>
+            </a:r>
+            <a:endParaRPr lang="en-US" sz="1100" dirty="0"/>
+          </a:p>
+        </p:txBody>
+      </p:sp>
+      <p:sp>
+        <p:nvSpPr>
           <p:cNvPr id="25" name="Slide Number Placeholder 0"/>
           <p:cNvSpPr>
             <a:spLocks noGrp="1"/>
@@ -7019,6 +7577,133 @@
       </p:sp>
       <p:sp>
         <p:nvSpPr>
+          <p:cNvPr id="5" name="Shape 2"/>
+          <p:cNvSpPr/>
+          <p:nvPr/>
+        </p:nvSpPr>
+        <p:spPr>
+          <a:xfrm>
+            <a:off x="8248599" y="91440"/>
+            <a:ext cx="3394456" cy="274320"/>
+          </a:xfrm>
+          <a:prstGeom prst="rect">
+            <a:avLst/>
+          </a:prstGeom>
+          <a:solidFill>
+            <a:srgbClr val="E0F2FE"/>
+          </a:solidFill>
+          <a:ln w="12700">
+            <a:solidFill>
+              <a:srgbClr val="0369A1"/>
+            </a:solidFill>
+            <a:prstDash val="solid"/>
+          </a:ln>
+        </p:spPr>
+      </p:sp>
+      <p:sp>
+        <p:nvSpPr>
+          <p:cNvPr id="6" name="Shape 3"/>
+          <p:cNvSpPr/>
+          <p:nvPr/>
+        </p:nvSpPr>
+        <p:spPr>
+          <a:xfrm>
+            <a:off x="8248599" y="91440"/>
+            <a:ext cx="73152" cy="274320"/>
+          </a:xfrm>
+          <a:prstGeom prst="rect">
+            <a:avLst/>
+          </a:prstGeom>
+          <a:solidFill>
+            <a:srgbClr val="0369A1"/>
+          </a:solidFill>
+          <a:ln w="12700">
+            <a:solidFill>
+              <a:srgbClr val="0369A1"/>
+            </a:solidFill>
+            <a:prstDash val="solid"/>
+          </a:ln>
+        </p:spPr>
+      </p:sp>
+      <p:pic>
+        <p:nvPicPr>
+          <p:cNvPr id="7" name="Image 0" descr="preencoded.png">    </p:cNvPr>
+          <p:cNvPicPr>
+            <a:picLocks noChangeAspect="1"/>
+          </p:cNvPicPr>
+          <p:nvPr/>
+        </p:nvPicPr>
+        <p:blipFill>
+          <a:blip r:embed="rId1"/>
+          <a:stretch>
+            <a:fillRect/>
+          </a:stretch>
+        </p:blipFill>
+        <p:spPr>
+          <a:xfrm>
+            <a:off x="8376615" y="128016"/>
+            <a:ext cx="201168" cy="201168"/>
+          </a:xfrm>
+          <a:prstGeom prst="rect">
+            <a:avLst/>
+          </a:prstGeom>
+        </p:spPr>
+      </p:pic>
+      <p:sp>
+        <p:nvSpPr>
+          <p:cNvPr id="8" name="Text 4"/>
+          <p:cNvSpPr txBox="1"/>
+          <p:nvPr/>
+        </p:nvSpPr>
+        <p:spPr>
+          <a:xfrm>
+            <a:off x="8632647" y="91440"/>
+            <a:ext cx="2973832" cy="274320"/>
+          </a:xfrm>
+          <a:prstGeom prst="rect">
+            <a:avLst/>
+          </a:prstGeom>
+          <a:noFill/>
+          <a:ln/>
+        </p:spPr>
+        <p:txBody>
+          <a:bodyPr wrap="square" lIns="0" tIns="0" rIns="0" bIns="0" rtlCol="0" anchor="ctr"/>
+          <a:lstStyle/>
+          <a:p>
+            <a:pPr indent="0" marL="0">
+              <a:buNone/>
+            </a:pPr>
+            <a:r>
+              <a:rPr lang="en-US" sz="1100" b="1" dirty="0">
+                <a:solidFill>
+                  <a:srgbClr val="075985"/>
+                </a:solidFill>
+                <a:latin typeface="Calibri" pitchFamily="34" charset="0"/>
+                <a:ea typeface="Calibri" pitchFamily="34" charset="-122"/>
+                <a:cs typeface="Calibri" pitchFamily="34" charset="-120"/>
+              </a:rPr>
+              <a:t>DA COMPRENDERE OGGI</a:t>
+            </a:r>
+            <a:pPr indent="0" marL="0">
+              <a:buNone/>
+            </a:pPr>
+            <a:r>
+              <a:rPr lang="en-US" sz="1100" dirty="0">
+                <a:solidFill>
+                  <a:srgbClr val="075985"/>
+                </a:solidFill>
+                <a:latin typeface="Calibri" pitchFamily="34" charset="0"/>
+                <a:ea typeface="Calibri" pitchFamily="34" charset="-122"/>
+                <a:cs typeface="Calibri" pitchFamily="34" charset="-120"/>
+              </a:rPr>
+              <a:t> · la scheda video</a:t>
+            </a:r>
+            <a:endParaRPr lang="en-US" sz="1100" dirty="0"/>
+          </a:p>
+        </p:txBody>
+      </p:sp>
+      <p:sp>
+        <p:nvSpPr>
           <p:cNvPr id="25" name="Slide Number Placeholder 0"/>
           <p:cNvSpPr>
             <a:spLocks noGrp="1"/>
@@ -8535,6 +9220,133 @@
       </p:graphicFrame>
       <p:sp>
         <p:nvSpPr>
+          <p:cNvPr id="4" name="Shape 1"/>
+          <p:cNvSpPr/>
+          <p:nvPr/>
+        </p:nvSpPr>
+        <p:spPr>
+          <a:xfrm>
+            <a:off x="8248599" y="91440"/>
+            <a:ext cx="3394456" cy="274320"/>
+          </a:xfrm>
+          <a:prstGeom prst="rect">
+            <a:avLst/>
+          </a:prstGeom>
+          <a:solidFill>
+            <a:srgbClr val="E0F2FE"/>
+          </a:solidFill>
+          <a:ln w="12700">
+            <a:solidFill>
+              <a:srgbClr val="0369A1"/>
+            </a:solidFill>
+            <a:prstDash val="solid"/>
+          </a:ln>
+        </p:spPr>
+      </p:sp>
+      <p:sp>
+        <p:nvSpPr>
+          <p:cNvPr id="5" name="Shape 2"/>
+          <p:cNvSpPr/>
+          <p:nvPr/>
+        </p:nvSpPr>
+        <p:spPr>
+          <a:xfrm>
+            <a:off x="8248599" y="91440"/>
+            <a:ext cx="73152" cy="274320"/>
+          </a:xfrm>
+          <a:prstGeom prst="rect">
+            <a:avLst/>
+          </a:prstGeom>
+          <a:solidFill>
+            <a:srgbClr val="0369A1"/>
+          </a:solidFill>
+          <a:ln w="12700">
+            <a:solidFill>
+              <a:srgbClr val="0369A1"/>
+            </a:solidFill>
+            <a:prstDash val="solid"/>
+          </a:ln>
+        </p:spPr>
+      </p:sp>
+      <p:pic>
+        <p:nvPicPr>
+          <p:cNvPr id="6" name="Image 0" descr="preencoded.png">    </p:cNvPr>
+          <p:cNvPicPr>
+            <a:picLocks noChangeAspect="1"/>
+          </p:cNvPicPr>
+          <p:nvPr/>
+        </p:nvPicPr>
+        <p:blipFill>
+          <a:blip r:embed="rId1"/>
+          <a:stretch>
+            <a:fillRect/>
+          </a:stretch>
+        </p:blipFill>
+        <p:spPr>
+          <a:xfrm>
+            <a:off x="8376615" y="128016"/>
+            <a:ext cx="201168" cy="201168"/>
+          </a:xfrm>
+          <a:prstGeom prst="rect">
+            <a:avLst/>
+          </a:prstGeom>
+        </p:spPr>
+      </p:pic>
+      <p:sp>
+        <p:nvSpPr>
+          <p:cNvPr id="7" name="Text 3"/>
+          <p:cNvSpPr txBox="1"/>
+          <p:nvPr/>
+        </p:nvSpPr>
+        <p:spPr>
+          <a:xfrm>
+            <a:off x="8632647" y="91440"/>
+            <a:ext cx="2973832" cy="274320"/>
+          </a:xfrm>
+          <a:prstGeom prst="rect">
+            <a:avLst/>
+          </a:prstGeom>
+          <a:noFill/>
+          <a:ln/>
+        </p:spPr>
+        <p:txBody>
+          <a:bodyPr wrap="square" lIns="0" tIns="0" rIns="0" bIns="0" rtlCol="0" anchor="ctr"/>
+          <a:lstStyle/>
+          <a:p>
+            <a:pPr indent="0" marL="0">
+              <a:buNone/>
+            </a:pPr>
+            <a:r>
+              <a:rPr lang="en-US" sz="1100" b="1" dirty="0">
+                <a:solidFill>
+                  <a:srgbClr val="075985"/>
+                </a:solidFill>
+                <a:latin typeface="Calibri" pitchFamily="34" charset="0"/>
+                <a:ea typeface="Calibri" pitchFamily="34" charset="-122"/>
+                <a:cs typeface="Calibri" pitchFamily="34" charset="-120"/>
+              </a:rPr>
+              <a:t>DA COMPRENDERE OGGI</a:t>
+            </a:r>
+            <a:pPr indent="0" marL="0">
+              <a:buNone/>
+            </a:pPr>
+            <a:r>
+              <a:rPr lang="en-US" sz="1100" dirty="0">
+                <a:solidFill>
+                  <a:srgbClr val="075985"/>
+                </a:solidFill>
+                <a:latin typeface="Calibri" pitchFamily="34" charset="0"/>
+                <a:ea typeface="Calibri" pitchFamily="34" charset="-122"/>
+                <a:cs typeface="Calibri" pitchFamily="34" charset="-120"/>
+              </a:rPr>
+              <a:t> · la scheda video</a:t>
+            </a:r>
+            <a:endParaRPr lang="en-US" sz="1100" dirty="0"/>
+          </a:p>
+        </p:txBody>
+      </p:sp>
+      <p:sp>
+        <p:nvSpPr>
           <p:cNvPr id="25" name="Slide Number Placeholder 0"/>
           <p:cNvSpPr>
             <a:spLocks noGrp="1"/>
@@ -9892,6 +10704,133 @@
       </p:sp>
       <p:sp>
         <p:nvSpPr>
+          <p:cNvPr id="14" name="Shape 11"/>
+          <p:cNvSpPr/>
+          <p:nvPr/>
+        </p:nvSpPr>
+        <p:spPr>
+          <a:xfrm>
+            <a:off x="8248599" y="91440"/>
+            <a:ext cx="3394456" cy="274320"/>
+          </a:xfrm>
+          <a:prstGeom prst="rect">
+            <a:avLst/>
+          </a:prstGeom>
+          <a:solidFill>
+            <a:srgbClr val="E0F2FE"/>
+          </a:solidFill>
+          <a:ln w="12700">
+            <a:solidFill>
+              <a:srgbClr val="0369A1"/>
+            </a:solidFill>
+            <a:prstDash val="solid"/>
+          </a:ln>
+        </p:spPr>
+      </p:sp>
+      <p:sp>
+        <p:nvSpPr>
+          <p:cNvPr id="15" name="Shape 12"/>
+          <p:cNvSpPr/>
+          <p:nvPr/>
+        </p:nvSpPr>
+        <p:spPr>
+          <a:xfrm>
+            <a:off x="8248599" y="91440"/>
+            <a:ext cx="73152" cy="274320"/>
+          </a:xfrm>
+          <a:prstGeom prst="rect">
+            <a:avLst/>
+          </a:prstGeom>
+          <a:solidFill>
+            <a:srgbClr val="0369A1"/>
+          </a:solidFill>
+          <a:ln w="12700">
+            <a:solidFill>
+              <a:srgbClr val="0369A1"/>
+            </a:solidFill>
+            <a:prstDash val="solid"/>
+          </a:ln>
+        </p:spPr>
+      </p:sp>
+      <p:pic>
+        <p:nvPicPr>
+          <p:cNvPr id="16" name="Image 0" descr="preencoded.png">    </p:cNvPr>
+          <p:cNvPicPr>
+            <a:picLocks noChangeAspect="1"/>
+          </p:cNvPicPr>
+          <p:nvPr/>
+        </p:nvPicPr>
+        <p:blipFill>
+          <a:blip r:embed="rId1"/>
+          <a:stretch>
+            <a:fillRect/>
+          </a:stretch>
+        </p:blipFill>
+        <p:spPr>
+          <a:xfrm>
+            <a:off x="8376615" y="128016"/>
+            <a:ext cx="201168" cy="201168"/>
+          </a:xfrm>
+          <a:prstGeom prst="rect">
+            <a:avLst/>
+          </a:prstGeom>
+        </p:spPr>
+      </p:pic>
+      <p:sp>
+        <p:nvSpPr>
+          <p:cNvPr id="17" name="Text 13"/>
+          <p:cNvSpPr txBox="1"/>
+          <p:nvPr/>
+        </p:nvSpPr>
+        <p:spPr>
+          <a:xfrm>
+            <a:off x="8632647" y="91440"/>
+            <a:ext cx="2973832" cy="274320"/>
+          </a:xfrm>
+          <a:prstGeom prst="rect">
+            <a:avLst/>
+          </a:prstGeom>
+          <a:noFill/>
+          <a:ln/>
+        </p:spPr>
+        <p:txBody>
+          <a:bodyPr wrap="square" lIns="0" tIns="0" rIns="0" bIns="0" rtlCol="0" anchor="ctr"/>
+          <a:lstStyle/>
+          <a:p>
+            <a:pPr indent="0" marL="0">
+              <a:buNone/>
+            </a:pPr>
+            <a:r>
+              <a:rPr lang="en-US" sz="1100" b="1" dirty="0">
+                <a:solidFill>
+                  <a:srgbClr val="075985"/>
+                </a:solidFill>
+                <a:latin typeface="Calibri" pitchFamily="34" charset="0"/>
+                <a:ea typeface="Calibri" pitchFamily="34" charset="-122"/>
+                <a:cs typeface="Calibri" pitchFamily="34" charset="-120"/>
+              </a:rPr>
+              <a:t>DA COMPRENDERE OGGI</a:t>
+            </a:r>
+            <a:pPr indent="0" marL="0">
+              <a:buNone/>
+            </a:pPr>
+            <a:r>
+              <a:rPr lang="en-US" sz="1100" dirty="0">
+                <a:solidFill>
+                  <a:srgbClr val="075985"/>
+                </a:solidFill>
+                <a:latin typeface="Calibri" pitchFamily="34" charset="0"/>
+                <a:ea typeface="Calibri" pitchFamily="34" charset="-122"/>
+                <a:cs typeface="Calibri" pitchFamily="34" charset="-120"/>
+              </a:rPr>
+              <a:t> · il frame buffer</a:t>
+            </a:r>
+            <a:endParaRPr lang="en-US" sz="1100" dirty="0"/>
+          </a:p>
+        </p:txBody>
+      </p:sp>
+      <p:sp>
+        <p:nvSpPr>
           <p:cNvPr id="25" name="Slide Number Placeholder 0"/>
           <p:cNvSpPr>
             <a:spLocks noGrp="1"/>
@@ -10486,6 +11425,133 @@
       </p:sp>
       <p:sp>
         <p:nvSpPr>
+          <p:cNvPr id="16" name="Shape 14"/>
+          <p:cNvSpPr/>
+          <p:nvPr/>
+        </p:nvSpPr>
+        <p:spPr>
+          <a:xfrm>
+            <a:off x="8248599" y="91440"/>
+            <a:ext cx="3394456" cy="274320"/>
+          </a:xfrm>
+          <a:prstGeom prst="rect">
+            <a:avLst/>
+          </a:prstGeom>
+          <a:solidFill>
+            <a:srgbClr val="E0F2FE"/>
+          </a:solidFill>
+          <a:ln w="12700">
+            <a:solidFill>
+              <a:srgbClr val="0369A1"/>
+            </a:solidFill>
+            <a:prstDash val="solid"/>
+          </a:ln>
+        </p:spPr>
+      </p:sp>
+      <p:sp>
+        <p:nvSpPr>
+          <p:cNvPr id="17" name="Shape 15"/>
+          <p:cNvSpPr/>
+          <p:nvPr/>
+        </p:nvSpPr>
+        <p:spPr>
+          <a:xfrm>
+            <a:off x="8248599" y="91440"/>
+            <a:ext cx="73152" cy="274320"/>
+          </a:xfrm>
+          <a:prstGeom prst="rect">
+            <a:avLst/>
+          </a:prstGeom>
+          <a:solidFill>
+            <a:srgbClr val="0369A1"/>
+          </a:solidFill>
+          <a:ln w="12700">
+            <a:solidFill>
+              <a:srgbClr val="0369A1"/>
+            </a:solidFill>
+            <a:prstDash val="solid"/>
+          </a:ln>
+        </p:spPr>
+      </p:sp>
+      <p:pic>
+        <p:nvPicPr>
+          <p:cNvPr id="18" name="Image 0" descr="preencoded.png">    </p:cNvPr>
+          <p:cNvPicPr>
+            <a:picLocks noChangeAspect="1"/>
+          </p:cNvPicPr>
+          <p:nvPr/>
+        </p:nvPicPr>
+        <p:blipFill>
+          <a:blip r:embed="rId1"/>
+          <a:stretch>
+            <a:fillRect/>
+          </a:stretch>
+        </p:blipFill>
+        <p:spPr>
+          <a:xfrm>
+            <a:off x="8376615" y="128016"/>
+            <a:ext cx="201168" cy="201168"/>
+          </a:xfrm>
+          <a:prstGeom prst="rect">
+            <a:avLst/>
+          </a:prstGeom>
+        </p:spPr>
+      </p:pic>
+      <p:sp>
+        <p:nvSpPr>
+          <p:cNvPr id="19" name="Text 16"/>
+          <p:cNvSpPr txBox="1"/>
+          <p:nvPr/>
+        </p:nvSpPr>
+        <p:spPr>
+          <a:xfrm>
+            <a:off x="8632647" y="91440"/>
+            <a:ext cx="2973832" cy="274320"/>
+          </a:xfrm>
+          <a:prstGeom prst="rect">
+            <a:avLst/>
+          </a:prstGeom>
+          <a:noFill/>
+          <a:ln/>
+        </p:spPr>
+        <p:txBody>
+          <a:bodyPr wrap="square" lIns="0" tIns="0" rIns="0" bIns="0" rtlCol="0" anchor="ctr"/>
+          <a:lstStyle/>
+          <a:p>
+            <a:pPr indent="0" marL="0">
+              <a:buNone/>
+            </a:pPr>
+            <a:r>
+              <a:rPr lang="en-US" sz="1100" b="1" dirty="0">
+                <a:solidFill>
+                  <a:srgbClr val="075985"/>
+                </a:solidFill>
+                <a:latin typeface="Calibri" pitchFamily="34" charset="0"/>
+                <a:ea typeface="Calibri" pitchFamily="34" charset="-122"/>
+                <a:cs typeface="Calibri" pitchFamily="34" charset="-120"/>
+              </a:rPr>
+              <a:t>DA COMPRENDERE OGGI</a:t>
+            </a:r>
+            <a:pPr indent="0" marL="0">
+              <a:buNone/>
+            </a:pPr>
+            <a:r>
+              <a:rPr lang="en-US" sz="1100" dirty="0">
+                <a:solidFill>
+                  <a:srgbClr val="075985"/>
+                </a:solidFill>
+                <a:latin typeface="Calibri" pitchFamily="34" charset="0"/>
+                <a:ea typeface="Calibri" pitchFamily="34" charset="-122"/>
+                <a:cs typeface="Calibri" pitchFamily="34" charset="-120"/>
+              </a:rPr>
+              <a:t> · la scheda video</a:t>
+            </a:r>
+            <a:endParaRPr lang="en-US" sz="1100" dirty="0"/>
+          </a:p>
+        </p:txBody>
+      </p:sp>
+      <p:sp>
+        <p:nvSpPr>
           <p:cNvPr id="25" name="Slide Number Placeholder 0"/>
           <p:cNvSpPr>
             <a:spLocks noGrp="1"/>
@@ -11038,6 +12104,133 @@
       </p:sp>
       <p:sp>
         <p:nvSpPr>
+          <p:cNvPr id="15" name="Shape 12"/>
+          <p:cNvSpPr/>
+          <p:nvPr/>
+        </p:nvSpPr>
+        <p:spPr>
+          <a:xfrm>
+            <a:off x="8511235" y="91440"/>
+            <a:ext cx="3131820" cy="274320"/>
+          </a:xfrm>
+          <a:prstGeom prst="rect">
+            <a:avLst/>
+          </a:prstGeom>
+          <a:solidFill>
+            <a:srgbClr val="E0F2FE"/>
+          </a:solidFill>
+          <a:ln w="12700">
+            <a:solidFill>
+              <a:srgbClr val="0369A1"/>
+            </a:solidFill>
+            <a:prstDash val="solid"/>
+          </a:ln>
+        </p:spPr>
+      </p:sp>
+      <p:sp>
+        <p:nvSpPr>
+          <p:cNvPr id="16" name="Shape 13"/>
+          <p:cNvSpPr/>
+          <p:nvPr/>
+        </p:nvSpPr>
+        <p:spPr>
+          <a:xfrm>
+            <a:off x="8511235" y="91440"/>
+            <a:ext cx="73152" cy="274320"/>
+          </a:xfrm>
+          <a:prstGeom prst="rect">
+            <a:avLst/>
+          </a:prstGeom>
+          <a:solidFill>
+            <a:srgbClr val="0369A1"/>
+          </a:solidFill>
+          <a:ln w="12700">
+            <a:solidFill>
+              <a:srgbClr val="0369A1"/>
+            </a:solidFill>
+            <a:prstDash val="solid"/>
+          </a:ln>
+        </p:spPr>
+      </p:sp>
+      <p:pic>
+        <p:nvPicPr>
+          <p:cNvPr id="17" name="Image 1" descr="preencoded.png">    </p:cNvPr>
+          <p:cNvPicPr>
+            <a:picLocks noChangeAspect="1"/>
+          </p:cNvPicPr>
+          <p:nvPr/>
+        </p:nvPicPr>
+        <p:blipFill>
+          <a:blip r:embed="rId2"/>
+          <a:stretch>
+            <a:fillRect/>
+          </a:stretch>
+        </p:blipFill>
+        <p:spPr>
+          <a:xfrm>
+            <a:off x="8639251" y="128016"/>
+            <a:ext cx="201168" cy="201168"/>
+          </a:xfrm>
+          <a:prstGeom prst="rect">
+            <a:avLst/>
+          </a:prstGeom>
+        </p:spPr>
+      </p:pic>
+      <p:sp>
+        <p:nvSpPr>
+          <p:cNvPr id="18" name="Text 14"/>
+          <p:cNvSpPr txBox="1"/>
+          <p:nvPr/>
+        </p:nvSpPr>
+        <p:spPr>
+          <a:xfrm>
+            <a:off x="8895283" y="91440"/>
+            <a:ext cx="2711196" cy="274320"/>
+          </a:xfrm>
+          <a:prstGeom prst="rect">
+            <a:avLst/>
+          </a:prstGeom>
+          <a:noFill/>
+          <a:ln/>
+        </p:spPr>
+        <p:txBody>
+          <a:bodyPr wrap="square" lIns="0" tIns="0" rIns="0" bIns="0" rtlCol="0" anchor="ctr"/>
+          <a:lstStyle/>
+          <a:p>
+            <a:pPr indent="0" marL="0">
+              <a:buNone/>
+            </a:pPr>
+            <a:r>
+              <a:rPr lang="en-US" sz="1100" b="1" dirty="0">
+                <a:solidFill>
+                  <a:srgbClr val="075985"/>
+                </a:solidFill>
+                <a:latin typeface="Calibri" pitchFamily="34" charset="0"/>
+                <a:ea typeface="Calibri" pitchFamily="34" charset="-122"/>
+                <a:cs typeface="Calibri" pitchFamily="34" charset="-120"/>
+              </a:rPr>
+              <a:t>DA COMPRENDERE OGGI</a:t>
+            </a:r>
+            <a:pPr indent="0" marL="0">
+              <a:buNone/>
+            </a:pPr>
+            <a:r>
+              <a:rPr lang="en-US" sz="1100" dirty="0">
+                <a:solidFill>
+                  <a:srgbClr val="075985"/>
+                </a:solidFill>
+                <a:latin typeface="Calibri" pitchFamily="34" charset="0"/>
+                <a:ea typeface="Calibri" pitchFamily="34" charset="-122"/>
+                <a:cs typeface="Calibri" pitchFamily="34" charset="-120"/>
+              </a:rPr>
+              <a:t> · GPU e GPGPU</a:t>
+            </a:r>
+            <a:endParaRPr lang="en-US" sz="1100" dirty="0"/>
+          </a:p>
+        </p:txBody>
+      </p:sp>
+      <p:sp>
+        <p:nvSpPr>
           <p:cNvPr id="25" name="Slide Number Placeholder 0"/>
           <p:cNvSpPr>
             <a:spLocks noGrp="1"/>
@@ -11545,6 +12738,133 @@
               <a:t>La stessa operazione su molti dati insieme</a:t>
             </a:r>
             <a:endParaRPr lang="en-US" sz="1200" dirty="0"/>
+          </a:p>
+        </p:txBody>
+      </p:sp>
+      <p:sp>
+        <p:nvSpPr>
+          <p:cNvPr id="15" name="Shape 12"/>
+          <p:cNvSpPr/>
+          <p:nvPr/>
+        </p:nvSpPr>
+        <p:spPr>
+          <a:xfrm>
+            <a:off x="8511235" y="91440"/>
+            <a:ext cx="3131820" cy="274320"/>
+          </a:xfrm>
+          <a:prstGeom prst="rect">
+            <a:avLst/>
+          </a:prstGeom>
+          <a:solidFill>
+            <a:srgbClr val="E0F2FE"/>
+          </a:solidFill>
+          <a:ln w="12700">
+            <a:solidFill>
+              <a:srgbClr val="0369A1"/>
+            </a:solidFill>
+            <a:prstDash val="solid"/>
+          </a:ln>
+        </p:spPr>
+      </p:sp>
+      <p:sp>
+        <p:nvSpPr>
+          <p:cNvPr id="16" name="Shape 13"/>
+          <p:cNvSpPr/>
+          <p:nvPr/>
+        </p:nvSpPr>
+        <p:spPr>
+          <a:xfrm>
+            <a:off x="8511235" y="91440"/>
+            <a:ext cx="73152" cy="274320"/>
+          </a:xfrm>
+          <a:prstGeom prst="rect">
+            <a:avLst/>
+          </a:prstGeom>
+          <a:solidFill>
+            <a:srgbClr val="0369A1"/>
+          </a:solidFill>
+          <a:ln w="12700">
+            <a:solidFill>
+              <a:srgbClr val="0369A1"/>
+            </a:solidFill>
+            <a:prstDash val="solid"/>
+          </a:ln>
+        </p:spPr>
+      </p:sp>
+      <p:pic>
+        <p:nvPicPr>
+          <p:cNvPr id="17" name="Image 1" descr="preencoded.png">    </p:cNvPr>
+          <p:cNvPicPr>
+            <a:picLocks noChangeAspect="1"/>
+          </p:cNvPicPr>
+          <p:nvPr/>
+        </p:nvPicPr>
+        <p:blipFill>
+          <a:blip r:embed="rId2"/>
+          <a:stretch>
+            <a:fillRect/>
+          </a:stretch>
+        </p:blipFill>
+        <p:spPr>
+          <a:xfrm>
+            <a:off x="8639251" y="128016"/>
+            <a:ext cx="201168" cy="201168"/>
+          </a:xfrm>
+          <a:prstGeom prst="rect">
+            <a:avLst/>
+          </a:prstGeom>
+        </p:spPr>
+      </p:pic>
+      <p:sp>
+        <p:nvSpPr>
+          <p:cNvPr id="18" name="Text 14"/>
+          <p:cNvSpPr txBox="1"/>
+          <p:nvPr/>
+        </p:nvSpPr>
+        <p:spPr>
+          <a:xfrm>
+            <a:off x="8895283" y="91440"/>
+            <a:ext cx="2711196" cy="274320"/>
+          </a:xfrm>
+          <a:prstGeom prst="rect">
+            <a:avLst/>
+          </a:prstGeom>
+          <a:noFill/>
+          <a:ln/>
+        </p:spPr>
+        <p:txBody>
+          <a:bodyPr wrap="square" lIns="0" tIns="0" rIns="0" bIns="0" rtlCol="0" anchor="ctr"/>
+          <a:lstStyle/>
+          <a:p>
+            <a:pPr indent="0" marL="0">
+              <a:buNone/>
+            </a:pPr>
+            <a:r>
+              <a:rPr lang="en-US" sz="1100" b="1" dirty="0">
+                <a:solidFill>
+                  <a:srgbClr val="075985"/>
+                </a:solidFill>
+                <a:latin typeface="Calibri" pitchFamily="34" charset="0"/>
+                <a:ea typeface="Calibri" pitchFamily="34" charset="-122"/>
+                <a:cs typeface="Calibri" pitchFamily="34" charset="-120"/>
+              </a:rPr>
+              <a:t>DA COMPRENDERE OGGI</a:t>
+            </a:r>
+            <a:pPr indent="0" marL="0">
+              <a:buNone/>
+            </a:pPr>
+            <a:r>
+              <a:rPr lang="en-US" sz="1100" dirty="0">
+                <a:solidFill>
+                  <a:srgbClr val="075985"/>
+                </a:solidFill>
+                <a:latin typeface="Calibri" pitchFamily="34" charset="0"/>
+                <a:ea typeface="Calibri" pitchFamily="34" charset="-122"/>
+                <a:cs typeface="Calibri" pitchFamily="34" charset="-120"/>
+              </a:rPr>
+              <a:t> · GPU e GPGPU</a:t>
+            </a:r>
+            <a:endParaRPr lang="en-US" sz="1100" dirty="0"/>
           </a:p>
         </p:txBody>
       </p:sp>
@@ -17277,6 +18597,133 @@
       </p:sp>
       <p:sp>
         <p:nvSpPr>
+          <p:cNvPr id="11" name="Shape 9"/>
+          <p:cNvSpPr/>
+          <p:nvPr/>
+        </p:nvSpPr>
+        <p:spPr>
+          <a:xfrm>
+            <a:off x="7198055" y="91440"/>
+            <a:ext cx="4445000" cy="274320"/>
+          </a:xfrm>
+          <a:prstGeom prst="rect">
+            <a:avLst/>
+          </a:prstGeom>
+          <a:solidFill>
+            <a:srgbClr val="E0F2FE"/>
+          </a:solidFill>
+          <a:ln w="12700">
+            <a:solidFill>
+              <a:srgbClr val="0369A1"/>
+            </a:solidFill>
+            <a:prstDash val="solid"/>
+          </a:ln>
+        </p:spPr>
+      </p:sp>
+      <p:sp>
+        <p:nvSpPr>
+          <p:cNvPr id="12" name="Shape 10"/>
+          <p:cNvSpPr/>
+          <p:nvPr/>
+        </p:nvSpPr>
+        <p:spPr>
+          <a:xfrm>
+            <a:off x="7198055" y="91440"/>
+            <a:ext cx="73152" cy="274320"/>
+          </a:xfrm>
+          <a:prstGeom prst="rect">
+            <a:avLst/>
+          </a:prstGeom>
+          <a:solidFill>
+            <a:srgbClr val="0369A1"/>
+          </a:solidFill>
+          <a:ln w="12700">
+            <a:solidFill>
+              <a:srgbClr val="0369A1"/>
+            </a:solidFill>
+            <a:prstDash val="solid"/>
+          </a:ln>
+        </p:spPr>
+      </p:sp>
+      <p:pic>
+        <p:nvPicPr>
+          <p:cNvPr id="13" name="Image 0" descr="preencoded.png">    </p:cNvPr>
+          <p:cNvPicPr>
+            <a:picLocks noChangeAspect="1"/>
+          </p:cNvPicPr>
+          <p:nvPr/>
+        </p:nvPicPr>
+        <p:blipFill>
+          <a:blip r:embed="rId1"/>
+          <a:stretch>
+            <a:fillRect/>
+          </a:stretch>
+        </p:blipFill>
+        <p:spPr>
+          <a:xfrm>
+            <a:off x="7326071" y="128016"/>
+            <a:ext cx="201168" cy="201168"/>
+          </a:xfrm>
+          <a:prstGeom prst="rect">
+            <a:avLst/>
+          </a:prstGeom>
+        </p:spPr>
+      </p:pic>
+      <p:sp>
+        <p:nvSpPr>
+          <p:cNvPr id="14" name="Text 11"/>
+          <p:cNvSpPr txBox="1"/>
+          <p:nvPr/>
+        </p:nvSpPr>
+        <p:spPr>
+          <a:xfrm>
+            <a:off x="7582103" y="91440"/>
+            <a:ext cx="4024376" cy="274320"/>
+          </a:xfrm>
+          <a:prstGeom prst="rect">
+            <a:avLst/>
+          </a:prstGeom>
+          <a:noFill/>
+          <a:ln/>
+        </p:spPr>
+        <p:txBody>
+          <a:bodyPr wrap="square" lIns="0" tIns="0" rIns="0" bIns="0" rtlCol="0" anchor="ctr"/>
+          <a:lstStyle/>
+          <a:p>
+            <a:pPr indent="0" marL="0">
+              <a:buNone/>
+            </a:pPr>
+            <a:r>
+              <a:rPr lang="en-US" sz="1100" b="1" dirty="0">
+                <a:solidFill>
+                  <a:srgbClr val="075985"/>
+                </a:solidFill>
+                <a:latin typeface="Calibri" pitchFamily="34" charset="0"/>
+                <a:ea typeface="Calibri" pitchFamily="34" charset="-122"/>
+                <a:cs typeface="Calibri" pitchFamily="34" charset="-120"/>
+              </a:rPr>
+              <a:t>DA COMPRENDERE OGGI</a:t>
+            </a:r>
+            <a:pPr indent="0" marL="0">
+              <a:buNone/>
+            </a:pPr>
+            <a:r>
+              <a:rPr lang="en-US" sz="1100" dirty="0">
+                <a:solidFill>
+                  <a:srgbClr val="075985"/>
+                </a:solidFill>
+                <a:latin typeface="Calibri" pitchFamily="34" charset="0"/>
+                <a:ea typeface="Calibri" pitchFamily="34" charset="-122"/>
+                <a:cs typeface="Calibri" pitchFamily="34" charset="-120"/>
+              </a:rPr>
+              <a:t> · i controllori delle periferiche</a:t>
+            </a:r>
+            <a:endParaRPr lang="en-US" sz="1100" dirty="0"/>
+          </a:p>
+        </p:txBody>
+      </p:sp>
+      <p:sp>
+        <p:nvSpPr>
           <p:cNvPr id="25" name="Slide Number Placeholder 0"/>
           <p:cNvSpPr>
             <a:spLocks noGrp="1"/>
@@ -18416,6 +19863,133 @@
       </p:sp>
       <p:sp>
         <p:nvSpPr>
+          <p:cNvPr id="31" name="Shape 29"/>
+          <p:cNvSpPr/>
+          <p:nvPr/>
+        </p:nvSpPr>
+        <p:spPr>
+          <a:xfrm>
+            <a:off x="7198055" y="91440"/>
+            <a:ext cx="4445000" cy="274320"/>
+          </a:xfrm>
+          <a:prstGeom prst="rect">
+            <a:avLst/>
+          </a:prstGeom>
+          <a:solidFill>
+            <a:srgbClr val="E0F2FE"/>
+          </a:solidFill>
+          <a:ln w="12700">
+            <a:solidFill>
+              <a:srgbClr val="0369A1"/>
+            </a:solidFill>
+            <a:prstDash val="solid"/>
+          </a:ln>
+        </p:spPr>
+      </p:sp>
+      <p:sp>
+        <p:nvSpPr>
+          <p:cNvPr id="32" name="Shape 30"/>
+          <p:cNvSpPr/>
+          <p:nvPr/>
+        </p:nvSpPr>
+        <p:spPr>
+          <a:xfrm>
+            <a:off x="7198055" y="91440"/>
+            <a:ext cx="73152" cy="274320"/>
+          </a:xfrm>
+          <a:prstGeom prst="rect">
+            <a:avLst/>
+          </a:prstGeom>
+          <a:solidFill>
+            <a:srgbClr val="0369A1"/>
+          </a:solidFill>
+          <a:ln w="12700">
+            <a:solidFill>
+              <a:srgbClr val="0369A1"/>
+            </a:solidFill>
+            <a:prstDash val="solid"/>
+          </a:ln>
+        </p:spPr>
+      </p:sp>
+      <p:pic>
+        <p:nvPicPr>
+          <p:cNvPr id="33" name="Image 0" descr="preencoded.png">    </p:cNvPr>
+          <p:cNvPicPr>
+            <a:picLocks noChangeAspect="1"/>
+          </p:cNvPicPr>
+          <p:nvPr/>
+        </p:nvPicPr>
+        <p:blipFill>
+          <a:blip r:embed="rId1"/>
+          <a:stretch>
+            <a:fillRect/>
+          </a:stretch>
+        </p:blipFill>
+        <p:spPr>
+          <a:xfrm>
+            <a:off x="7326071" y="128016"/>
+            <a:ext cx="201168" cy="201168"/>
+          </a:xfrm>
+          <a:prstGeom prst="rect">
+            <a:avLst/>
+          </a:prstGeom>
+        </p:spPr>
+      </p:pic>
+      <p:sp>
+        <p:nvSpPr>
+          <p:cNvPr id="34" name="Text 31"/>
+          <p:cNvSpPr txBox="1"/>
+          <p:nvPr/>
+        </p:nvSpPr>
+        <p:spPr>
+          <a:xfrm>
+            <a:off x="7582103" y="91440"/>
+            <a:ext cx="4024376" cy="274320"/>
+          </a:xfrm>
+          <a:prstGeom prst="rect">
+            <a:avLst/>
+          </a:prstGeom>
+          <a:noFill/>
+          <a:ln/>
+        </p:spPr>
+        <p:txBody>
+          <a:bodyPr wrap="square" lIns="0" tIns="0" rIns="0" bIns="0" rtlCol="0" anchor="ctr"/>
+          <a:lstStyle/>
+          <a:p>
+            <a:pPr indent="0" marL="0">
+              <a:buNone/>
+            </a:pPr>
+            <a:r>
+              <a:rPr lang="en-US" sz="1100" b="1" dirty="0">
+                <a:solidFill>
+                  <a:srgbClr val="075985"/>
+                </a:solidFill>
+                <a:latin typeface="Calibri" pitchFamily="34" charset="0"/>
+                <a:ea typeface="Calibri" pitchFamily="34" charset="-122"/>
+                <a:cs typeface="Calibri" pitchFamily="34" charset="-120"/>
+              </a:rPr>
+              <a:t>DA COMPRENDERE OGGI</a:t>
+            </a:r>
+            <a:pPr indent="0" marL="0">
+              <a:buNone/>
+            </a:pPr>
+            <a:r>
+              <a:rPr lang="en-US" sz="1100" dirty="0">
+                <a:solidFill>
+                  <a:srgbClr val="075985"/>
+                </a:solidFill>
+                <a:latin typeface="Calibri" pitchFamily="34" charset="0"/>
+                <a:ea typeface="Calibri" pitchFamily="34" charset="-122"/>
+                <a:cs typeface="Calibri" pitchFamily="34" charset="-120"/>
+              </a:rPr>
+              <a:t> · i controllori delle periferiche</a:t>
+            </a:r>
+            <a:endParaRPr lang="en-US" sz="1100" dirty="0"/>
+          </a:p>
+        </p:txBody>
+      </p:sp>
+      <p:sp>
+        <p:nvSpPr>
           <p:cNvPr id="25" name="Slide Number Placeholder 0"/>
           <p:cNvSpPr>
             <a:spLocks noGrp="1"/>
@@ -19030,6 +20604,133 @@
       </p:sp>
       <p:sp>
         <p:nvSpPr>
+          <p:cNvPr id="16" name="Shape 14"/>
+          <p:cNvSpPr/>
+          <p:nvPr/>
+        </p:nvSpPr>
+        <p:spPr>
+          <a:xfrm>
+            <a:off x="8511235" y="91440"/>
+            <a:ext cx="3131820" cy="274320"/>
+          </a:xfrm>
+          <a:prstGeom prst="rect">
+            <a:avLst/>
+          </a:prstGeom>
+          <a:solidFill>
+            <a:srgbClr val="E0F2FE"/>
+          </a:solidFill>
+          <a:ln w="12700">
+            <a:solidFill>
+              <a:srgbClr val="0369A1"/>
+            </a:solidFill>
+            <a:prstDash val="solid"/>
+          </a:ln>
+        </p:spPr>
+      </p:sp>
+      <p:sp>
+        <p:nvSpPr>
+          <p:cNvPr id="17" name="Shape 15"/>
+          <p:cNvSpPr/>
+          <p:nvPr/>
+        </p:nvSpPr>
+        <p:spPr>
+          <a:xfrm>
+            <a:off x="8511235" y="91440"/>
+            <a:ext cx="73152" cy="274320"/>
+          </a:xfrm>
+          <a:prstGeom prst="rect">
+            <a:avLst/>
+          </a:prstGeom>
+          <a:solidFill>
+            <a:srgbClr val="0369A1"/>
+          </a:solidFill>
+          <a:ln w="12700">
+            <a:solidFill>
+              <a:srgbClr val="0369A1"/>
+            </a:solidFill>
+            <a:prstDash val="solid"/>
+          </a:ln>
+        </p:spPr>
+      </p:sp>
+      <p:pic>
+        <p:nvPicPr>
+          <p:cNvPr id="18" name="Image 0" descr="preencoded.png">    </p:cNvPr>
+          <p:cNvPicPr>
+            <a:picLocks noChangeAspect="1"/>
+          </p:cNvPicPr>
+          <p:nvPr/>
+        </p:nvPicPr>
+        <p:blipFill>
+          <a:blip r:embed="rId1"/>
+          <a:stretch>
+            <a:fillRect/>
+          </a:stretch>
+        </p:blipFill>
+        <p:spPr>
+          <a:xfrm>
+            <a:off x="8639251" y="128016"/>
+            <a:ext cx="201168" cy="201168"/>
+          </a:xfrm>
+          <a:prstGeom prst="rect">
+            <a:avLst/>
+          </a:prstGeom>
+        </p:spPr>
+      </p:pic>
+      <p:sp>
+        <p:nvSpPr>
+          <p:cNvPr id="19" name="Text 16"/>
+          <p:cNvSpPr txBox="1"/>
+          <p:nvPr/>
+        </p:nvSpPr>
+        <p:spPr>
+          <a:xfrm>
+            <a:off x="8895283" y="91440"/>
+            <a:ext cx="2711196" cy="274320"/>
+          </a:xfrm>
+          <a:prstGeom prst="rect">
+            <a:avLst/>
+          </a:prstGeom>
+          <a:noFill/>
+          <a:ln/>
+        </p:spPr>
+        <p:txBody>
+          <a:bodyPr wrap="square" lIns="0" tIns="0" rIns="0" bIns="0" rtlCol="0" anchor="ctr"/>
+          <a:lstStyle/>
+          <a:p>
+            <a:pPr indent="0" marL="0">
+              <a:buNone/>
+            </a:pPr>
+            <a:r>
+              <a:rPr lang="en-US" sz="1100" b="1" dirty="0">
+                <a:solidFill>
+                  <a:srgbClr val="075985"/>
+                </a:solidFill>
+                <a:latin typeface="Calibri" pitchFamily="34" charset="0"/>
+                <a:ea typeface="Calibri" pitchFamily="34" charset="-122"/>
+                <a:cs typeface="Calibri" pitchFamily="34" charset="-120"/>
+              </a:rPr>
+              <a:t>DA COMPRENDERE OGGI</a:t>
+            </a:r>
+            <a:pPr indent="0" marL="0">
+              <a:buNone/>
+            </a:pPr>
+            <a:r>
+              <a:rPr lang="en-US" sz="1100" dirty="0">
+                <a:solidFill>
+                  <a:srgbClr val="075985"/>
+                </a:solidFill>
+                <a:latin typeface="Calibri" pitchFamily="34" charset="0"/>
+                <a:ea typeface="Calibri" pitchFamily="34" charset="-122"/>
+                <a:cs typeface="Calibri" pitchFamily="34" charset="-120"/>
+              </a:rPr>
+              <a:t> · bus e banda</a:t>
+            </a:r>
+            <a:endParaRPr lang="en-US" sz="1100" dirty="0"/>
+          </a:p>
+        </p:txBody>
+      </p:sp>
+      <p:sp>
+        <p:nvSpPr>
           <p:cNvPr id="25" name="Slide Number Placeholder 0"/>
           <p:cNvSpPr>
             <a:spLocks noGrp="1"/>
@@ -19499,6 +21200,133 @@
               <a:t>Una risorsa condivisa: un solo trasferimento alla volta</a:t>
             </a:r>
             <a:endParaRPr lang="en-US" sz="2100" dirty="0"/>
+          </a:p>
+        </p:txBody>
+      </p:sp>
+      <p:sp>
+        <p:nvSpPr>
+          <p:cNvPr id="9" name="Shape 7"/>
+          <p:cNvSpPr/>
+          <p:nvPr/>
+        </p:nvSpPr>
+        <p:spPr>
+          <a:xfrm>
+            <a:off x="8511235" y="91440"/>
+            <a:ext cx="3131820" cy="274320"/>
+          </a:xfrm>
+          <a:prstGeom prst="rect">
+            <a:avLst/>
+          </a:prstGeom>
+          <a:solidFill>
+            <a:srgbClr val="E0F2FE"/>
+          </a:solidFill>
+          <a:ln w="12700">
+            <a:solidFill>
+              <a:srgbClr val="0369A1"/>
+            </a:solidFill>
+            <a:prstDash val="solid"/>
+          </a:ln>
+        </p:spPr>
+      </p:sp>
+      <p:sp>
+        <p:nvSpPr>
+          <p:cNvPr id="10" name="Shape 8"/>
+          <p:cNvSpPr/>
+          <p:nvPr/>
+        </p:nvSpPr>
+        <p:spPr>
+          <a:xfrm>
+            <a:off x="8511235" y="91440"/>
+            <a:ext cx="73152" cy="274320"/>
+          </a:xfrm>
+          <a:prstGeom prst="rect">
+            <a:avLst/>
+          </a:prstGeom>
+          <a:solidFill>
+            <a:srgbClr val="0369A1"/>
+          </a:solidFill>
+          <a:ln w="12700">
+            <a:solidFill>
+              <a:srgbClr val="0369A1"/>
+            </a:solidFill>
+            <a:prstDash val="solid"/>
+          </a:ln>
+        </p:spPr>
+      </p:sp>
+      <p:pic>
+        <p:nvPicPr>
+          <p:cNvPr id="11" name="Image 0" descr="preencoded.png">    </p:cNvPr>
+          <p:cNvPicPr>
+            <a:picLocks noChangeAspect="1"/>
+          </p:cNvPicPr>
+          <p:nvPr/>
+        </p:nvPicPr>
+        <p:blipFill>
+          <a:blip r:embed="rId1"/>
+          <a:stretch>
+            <a:fillRect/>
+          </a:stretch>
+        </p:blipFill>
+        <p:spPr>
+          <a:xfrm>
+            <a:off x="8639251" y="128016"/>
+            <a:ext cx="201168" cy="201168"/>
+          </a:xfrm>
+          <a:prstGeom prst="rect">
+            <a:avLst/>
+          </a:prstGeom>
+        </p:spPr>
+      </p:pic>
+      <p:sp>
+        <p:nvSpPr>
+          <p:cNvPr id="12" name="Text 9"/>
+          <p:cNvSpPr txBox="1"/>
+          <p:nvPr/>
+        </p:nvSpPr>
+        <p:spPr>
+          <a:xfrm>
+            <a:off x="8895283" y="91440"/>
+            <a:ext cx="2711196" cy="274320"/>
+          </a:xfrm>
+          <a:prstGeom prst="rect">
+            <a:avLst/>
+          </a:prstGeom>
+          <a:noFill/>
+          <a:ln/>
+        </p:spPr>
+        <p:txBody>
+          <a:bodyPr wrap="square" lIns="0" tIns="0" rIns="0" bIns="0" rtlCol="0" anchor="ctr"/>
+          <a:lstStyle/>
+          <a:p>
+            <a:pPr indent="0" marL="0">
+              <a:buNone/>
+            </a:pPr>
+            <a:r>
+              <a:rPr lang="en-US" sz="1100" b="1" dirty="0">
+                <a:solidFill>
+                  <a:srgbClr val="075985"/>
+                </a:solidFill>
+                <a:latin typeface="Calibri" pitchFamily="34" charset="0"/>
+                <a:ea typeface="Calibri" pitchFamily="34" charset="-122"/>
+                <a:cs typeface="Calibri" pitchFamily="34" charset="-120"/>
+              </a:rPr>
+              <a:t>DA COMPRENDERE OGGI</a:t>
+            </a:r>
+            <a:pPr indent="0" marL="0">
+              <a:buNone/>
+            </a:pPr>
+            <a:r>
+              <a:rPr lang="en-US" sz="1100" dirty="0">
+                <a:solidFill>
+                  <a:srgbClr val="075985"/>
+                </a:solidFill>
+                <a:latin typeface="Calibri" pitchFamily="34" charset="0"/>
+                <a:ea typeface="Calibri" pitchFamily="34" charset="-122"/>
+                <a:cs typeface="Calibri" pitchFamily="34" charset="-120"/>
+              </a:rPr>
+              <a:t> · bus e banda</a:t>
+            </a:r>
+            <a:endParaRPr lang="en-US" sz="1100" dirty="0"/>
           </a:p>
         </p:txBody>
       </p:sp>
@@ -21842,6 +23670,133 @@
       </p:graphicFrame>
       <p:sp>
         <p:nvSpPr>
+          <p:cNvPr id="4" name="Shape 1"/>
+          <p:cNvSpPr/>
+          <p:nvPr/>
+        </p:nvSpPr>
+        <p:spPr>
+          <a:xfrm>
+            <a:off x="8511235" y="91440"/>
+            <a:ext cx="3131820" cy="274320"/>
+          </a:xfrm>
+          <a:prstGeom prst="rect">
+            <a:avLst/>
+          </a:prstGeom>
+          <a:solidFill>
+            <a:srgbClr val="E0F2FE"/>
+          </a:solidFill>
+          <a:ln w="12700">
+            <a:solidFill>
+              <a:srgbClr val="0369A1"/>
+            </a:solidFill>
+            <a:prstDash val="solid"/>
+          </a:ln>
+        </p:spPr>
+      </p:sp>
+      <p:sp>
+        <p:nvSpPr>
+          <p:cNvPr id="5" name="Shape 2"/>
+          <p:cNvSpPr/>
+          <p:nvPr/>
+        </p:nvSpPr>
+        <p:spPr>
+          <a:xfrm>
+            <a:off x="8511235" y="91440"/>
+            <a:ext cx="73152" cy="274320"/>
+          </a:xfrm>
+          <a:prstGeom prst="rect">
+            <a:avLst/>
+          </a:prstGeom>
+          <a:solidFill>
+            <a:srgbClr val="0369A1"/>
+          </a:solidFill>
+          <a:ln w="12700">
+            <a:solidFill>
+              <a:srgbClr val="0369A1"/>
+            </a:solidFill>
+            <a:prstDash val="solid"/>
+          </a:ln>
+        </p:spPr>
+      </p:sp>
+      <p:pic>
+        <p:nvPicPr>
+          <p:cNvPr id="6" name="Image 0" descr="preencoded.png">    </p:cNvPr>
+          <p:cNvPicPr>
+            <a:picLocks noChangeAspect="1"/>
+          </p:cNvPicPr>
+          <p:nvPr/>
+        </p:nvPicPr>
+        <p:blipFill>
+          <a:blip r:embed="rId1"/>
+          <a:stretch>
+            <a:fillRect/>
+          </a:stretch>
+        </p:blipFill>
+        <p:spPr>
+          <a:xfrm>
+            <a:off x="8639251" y="128016"/>
+            <a:ext cx="201168" cy="201168"/>
+          </a:xfrm>
+          <a:prstGeom prst="rect">
+            <a:avLst/>
+          </a:prstGeom>
+        </p:spPr>
+      </p:pic>
+      <p:sp>
+        <p:nvSpPr>
+          <p:cNvPr id="7" name="Text 3"/>
+          <p:cNvSpPr txBox="1"/>
+          <p:nvPr/>
+        </p:nvSpPr>
+        <p:spPr>
+          <a:xfrm>
+            <a:off x="8895283" y="91440"/>
+            <a:ext cx="2711196" cy="274320"/>
+          </a:xfrm>
+          <a:prstGeom prst="rect">
+            <a:avLst/>
+          </a:prstGeom>
+          <a:noFill/>
+          <a:ln/>
+        </p:spPr>
+        <p:txBody>
+          <a:bodyPr wrap="square" lIns="0" tIns="0" rIns="0" bIns="0" rtlCol="0" anchor="ctr"/>
+          <a:lstStyle/>
+          <a:p>
+            <a:pPr indent="0" marL="0">
+              <a:buNone/>
+            </a:pPr>
+            <a:r>
+              <a:rPr lang="en-US" sz="1100" b="1" dirty="0">
+                <a:solidFill>
+                  <a:srgbClr val="075985"/>
+                </a:solidFill>
+                <a:latin typeface="Calibri" pitchFamily="34" charset="0"/>
+                <a:ea typeface="Calibri" pitchFamily="34" charset="-122"/>
+                <a:cs typeface="Calibri" pitchFamily="34" charset="-120"/>
+              </a:rPr>
+              <a:t>DA COMPRENDERE OGGI</a:t>
+            </a:r>
+            <a:pPr indent="0" marL="0">
+              <a:buNone/>
+            </a:pPr>
+            <a:r>
+              <a:rPr lang="en-US" sz="1100" dirty="0">
+                <a:solidFill>
+                  <a:srgbClr val="075985"/>
+                </a:solidFill>
+                <a:latin typeface="Calibri" pitchFamily="34" charset="0"/>
+                <a:ea typeface="Calibri" pitchFamily="34" charset="-122"/>
+                <a:cs typeface="Calibri" pitchFamily="34" charset="-120"/>
+              </a:rPr>
+              <a:t> · bus e banda</a:t>
+            </a:r>
+            <a:endParaRPr lang="en-US" sz="1100" dirty="0"/>
+          </a:p>
+        </p:txBody>
+      </p:sp>
+      <p:sp>
+        <p:nvSpPr>
           <p:cNvPr id="25" name="Slide Number Placeholder 0"/>
           <p:cNvSpPr>
             <a:spLocks noGrp="1"/>
@@ -22291,6 +24246,133 @@
       </p:sp>
       <p:sp>
         <p:nvSpPr>
+          <p:cNvPr id="13" name="Shape 11"/>
+          <p:cNvSpPr/>
+          <p:nvPr/>
+        </p:nvSpPr>
+        <p:spPr>
+          <a:xfrm>
+            <a:off x="8248599" y="91440"/>
+            <a:ext cx="3394456" cy="274320"/>
+          </a:xfrm>
+          <a:prstGeom prst="rect">
+            <a:avLst/>
+          </a:prstGeom>
+          <a:solidFill>
+            <a:srgbClr val="E0F2FE"/>
+          </a:solidFill>
+          <a:ln w="12700">
+            <a:solidFill>
+              <a:srgbClr val="0369A1"/>
+            </a:solidFill>
+            <a:prstDash val="solid"/>
+          </a:ln>
+        </p:spPr>
+      </p:sp>
+      <p:sp>
+        <p:nvSpPr>
+          <p:cNvPr id="14" name="Shape 12"/>
+          <p:cNvSpPr/>
+          <p:nvPr/>
+        </p:nvSpPr>
+        <p:spPr>
+          <a:xfrm>
+            <a:off x="8248599" y="91440"/>
+            <a:ext cx="73152" cy="274320"/>
+          </a:xfrm>
+          <a:prstGeom prst="rect">
+            <a:avLst/>
+          </a:prstGeom>
+          <a:solidFill>
+            <a:srgbClr val="0369A1"/>
+          </a:solidFill>
+          <a:ln w="12700">
+            <a:solidFill>
+              <a:srgbClr val="0369A1"/>
+            </a:solidFill>
+            <a:prstDash val="solid"/>
+          </a:ln>
+        </p:spPr>
+      </p:sp>
+      <p:pic>
+        <p:nvPicPr>
+          <p:cNvPr id="15" name="Image 0" descr="preencoded.png">    </p:cNvPr>
+          <p:cNvPicPr>
+            <a:picLocks noChangeAspect="1"/>
+          </p:cNvPicPr>
+          <p:nvPr/>
+        </p:nvPicPr>
+        <p:blipFill>
+          <a:blip r:embed="rId1"/>
+          <a:stretch>
+            <a:fillRect/>
+          </a:stretch>
+        </p:blipFill>
+        <p:spPr>
+          <a:xfrm>
+            <a:off x="8376615" y="128016"/>
+            <a:ext cx="201168" cy="201168"/>
+          </a:xfrm>
+          <a:prstGeom prst="rect">
+            <a:avLst/>
+          </a:prstGeom>
+        </p:spPr>
+      </p:pic>
+      <p:sp>
+        <p:nvSpPr>
+          <p:cNvPr id="16" name="Text 13"/>
+          <p:cNvSpPr txBox="1"/>
+          <p:nvPr/>
+        </p:nvSpPr>
+        <p:spPr>
+          <a:xfrm>
+            <a:off x="8632647" y="91440"/>
+            <a:ext cx="2973832" cy="274320"/>
+          </a:xfrm>
+          <a:prstGeom prst="rect">
+            <a:avLst/>
+          </a:prstGeom>
+          <a:noFill/>
+          <a:ln/>
+        </p:spPr>
+        <p:txBody>
+          <a:bodyPr wrap="square" lIns="0" tIns="0" rIns="0" bIns="0" rtlCol="0" anchor="ctr"/>
+          <a:lstStyle/>
+          <a:p>
+            <a:pPr indent="0" marL="0">
+              <a:buNone/>
+            </a:pPr>
+            <a:r>
+              <a:rPr lang="en-US" sz="1100" b="1" dirty="0">
+                <a:solidFill>
+                  <a:srgbClr val="075985"/>
+                </a:solidFill>
+                <a:latin typeface="Calibri" pitchFamily="34" charset="0"/>
+                <a:ea typeface="Calibri" pitchFamily="34" charset="-122"/>
+                <a:cs typeface="Calibri" pitchFamily="34" charset="-120"/>
+              </a:rPr>
+              <a:t>DA COMPRENDERE OGGI</a:t>
+            </a:r>
+            <a:pPr indent="0" marL="0">
+              <a:buNone/>
+            </a:pPr>
+            <a:r>
+              <a:rPr lang="en-US" sz="1100" dirty="0">
+                <a:solidFill>
+                  <a:srgbClr val="075985"/>
+                </a:solidFill>
+                <a:latin typeface="Calibri" pitchFamily="34" charset="0"/>
+                <a:ea typeface="Calibri" pitchFamily="34" charset="-122"/>
+                <a:cs typeface="Calibri" pitchFamily="34" charset="-120"/>
+              </a:rPr>
+              <a:t> · la scheda video</a:t>
+            </a:r>
+            <a:endParaRPr lang="en-US" sz="1100" dirty="0"/>
+          </a:p>
+        </p:txBody>
+      </p:sp>
+      <p:sp>
+        <p:nvSpPr>
           <p:cNvPr id="25" name="Slide Number Placeholder 0"/>
           <p:cNvSpPr>
             <a:spLocks noGrp="1"/>
@@ -22760,6 +24842,133 @@
               <a:t>DVI: ogni pixel dell'uscita corrisponde a un pixel dello schermo, alla sua risoluzione nativa</a:t>
             </a:r>
             <a:endParaRPr lang="en-US" sz="1900" dirty="0"/>
+          </a:p>
+        </p:txBody>
+      </p:sp>
+      <p:sp>
+        <p:nvSpPr>
+          <p:cNvPr id="9" name="Shape 7"/>
+          <p:cNvSpPr/>
+          <p:nvPr/>
+        </p:nvSpPr>
+        <p:spPr>
+          <a:xfrm>
+            <a:off x="8248599" y="91440"/>
+            <a:ext cx="3394456" cy="274320"/>
+          </a:xfrm>
+          <a:prstGeom prst="rect">
+            <a:avLst/>
+          </a:prstGeom>
+          <a:solidFill>
+            <a:srgbClr val="E0F2FE"/>
+          </a:solidFill>
+          <a:ln w="12700">
+            <a:solidFill>
+              <a:srgbClr val="0369A1"/>
+            </a:solidFill>
+            <a:prstDash val="solid"/>
+          </a:ln>
+        </p:spPr>
+      </p:sp>
+      <p:sp>
+        <p:nvSpPr>
+          <p:cNvPr id="10" name="Shape 8"/>
+          <p:cNvSpPr/>
+          <p:nvPr/>
+        </p:nvSpPr>
+        <p:spPr>
+          <a:xfrm>
+            <a:off x="8248599" y="91440"/>
+            <a:ext cx="73152" cy="274320"/>
+          </a:xfrm>
+          <a:prstGeom prst="rect">
+            <a:avLst/>
+          </a:prstGeom>
+          <a:solidFill>
+            <a:srgbClr val="0369A1"/>
+          </a:solidFill>
+          <a:ln w="12700">
+            <a:solidFill>
+              <a:srgbClr val="0369A1"/>
+            </a:solidFill>
+            <a:prstDash val="solid"/>
+          </a:ln>
+        </p:spPr>
+      </p:sp>
+      <p:pic>
+        <p:nvPicPr>
+          <p:cNvPr id="11" name="Image 0" descr="preencoded.png">    </p:cNvPr>
+          <p:cNvPicPr>
+            <a:picLocks noChangeAspect="1"/>
+          </p:cNvPicPr>
+          <p:nvPr/>
+        </p:nvPicPr>
+        <p:blipFill>
+          <a:blip r:embed="rId1"/>
+          <a:stretch>
+            <a:fillRect/>
+          </a:stretch>
+        </p:blipFill>
+        <p:spPr>
+          <a:xfrm>
+            <a:off x="8376615" y="128016"/>
+            <a:ext cx="201168" cy="201168"/>
+          </a:xfrm>
+          <a:prstGeom prst="rect">
+            <a:avLst/>
+          </a:prstGeom>
+        </p:spPr>
+      </p:pic>
+      <p:sp>
+        <p:nvSpPr>
+          <p:cNvPr id="12" name="Text 9"/>
+          <p:cNvSpPr txBox="1"/>
+          <p:nvPr/>
+        </p:nvSpPr>
+        <p:spPr>
+          <a:xfrm>
+            <a:off x="8632647" y="91440"/>
+            <a:ext cx="2973832" cy="274320"/>
+          </a:xfrm>
+          <a:prstGeom prst="rect">
+            <a:avLst/>
+          </a:prstGeom>
+          <a:noFill/>
+          <a:ln/>
+        </p:spPr>
+        <p:txBody>
+          <a:bodyPr wrap="square" lIns="0" tIns="0" rIns="0" bIns="0" rtlCol="0" anchor="ctr"/>
+          <a:lstStyle/>
+          <a:p>
+            <a:pPr indent="0" marL="0">
+              <a:buNone/>
+            </a:pPr>
+            <a:r>
+              <a:rPr lang="en-US" sz="1100" b="1" dirty="0">
+                <a:solidFill>
+                  <a:srgbClr val="075985"/>
+                </a:solidFill>
+                <a:latin typeface="Calibri" pitchFamily="34" charset="0"/>
+                <a:ea typeface="Calibri" pitchFamily="34" charset="-122"/>
+                <a:cs typeface="Calibri" pitchFamily="34" charset="-120"/>
+              </a:rPr>
+              <a:t>DA COMPRENDERE OGGI</a:t>
+            </a:r>
+            <a:pPr indent="0" marL="0">
+              <a:buNone/>
+            </a:pPr>
+            <a:r>
+              <a:rPr lang="en-US" sz="1100" dirty="0">
+                <a:solidFill>
+                  <a:srgbClr val="075985"/>
+                </a:solidFill>
+                <a:latin typeface="Calibri" pitchFamily="34" charset="0"/>
+                <a:ea typeface="Calibri" pitchFamily="34" charset="-122"/>
+                <a:cs typeface="Calibri" pitchFamily="34" charset="-120"/>
+              </a:rPr>
+              <a:t> · la scheda video</a:t>
+            </a:r>
+            <a:endParaRPr lang="en-US" sz="1100" dirty="0"/>
           </a:p>
         </p:txBody>
       </p:sp>

--- a/it/slides/20-Architettura_dei_Calcolatori-Scheda_Video.pptx
+++ b/it/slides/20-Architettura_dei_Calcolatori-Scheda_Video.pptx
@@ -126,26 +126,26 @@
   <p:extLst>
     <p:ext uri="{521415D9-36F7-43E2-AB2F-B90AF26B5E84}">
       <p14:sectionLst xmlns:p14="http://schemas.microsoft.com/office/powerpoint/2010/main">
-        <p14:section name="Apertura" id="{846b3f2d-23bc-b449-4715-27e1ac0a5c52}">
+        <p14:section name="Apertura" id="{f76f3362-ccec-a80d-9a14-a539c710cf32}">
           <p14:sldIdLst>
             <p14:sldId id="256"/>
             <p14:sldId id="257"/>
           </p14:sldIdLst>
         </p14:section>
-        <p14:section name="Periferiche e controller" id="{0458d1e9-59ad-d82e-aab2-f292cd7fe39a}">
+        <p14:section name="Periferiche e controller" id="{c9514ebd-4ab6-013d-e047-ccb523e692fb}">
           <p14:sldIdLst>
             <p14:sldId id="258"/>
             <p14:sldId id="259"/>
           </p14:sldIdLst>
         </p14:section>
-        <p14:section name="I bus" id="{6e7de2d2-491a-769b-b71e-2d4a0a37ff14}">
+        <p14:section name="I bus" id="{3102b85a-c4b4-464e-6d25-2538656b615a}">
           <p14:sldIdLst>
             <p14:sldId id="260"/>
             <p14:sldId id="261"/>
             <p14:sldId id="262"/>
           </p14:sldIdLst>
         </p14:section>
-        <p14:section name="La scheda video" id="{d52362a0-a25a-2e48-c299-2618b395fd37}">
+        <p14:section name="La scheda video" id="{dcb1b635-7920-8a44-ff2a-c80cdd124541}">
           <p14:sldIdLst>
             <p14:sldId id="263"/>
             <p14:sldId id="264"/>
@@ -156,7 +156,7 @@
             <p14:sldId id="269"/>
           </p14:sldIdLst>
         </p14:section>
-        <p14:section name="GPU e GPGPU" id="{140802bd-7341-76e7-a361-b50c99198b24}">
+        <p14:section name="GPU e GPGPU" id="{3afc9986-c384-11c2-6eca-c552d07f498e}">
           <p14:sldIdLst>
             <p14:sldId id="270"/>
             <p14:sldId id="271"/>

--- a/it/slides/20-Architettura_dei_Calcolatori-Scheda_Video.pptx
+++ b/it/slides/20-Architettura_dei_Calcolatori-Scheda_Video.pptx
@@ -126,26 +126,26 @@
   <p:extLst>
     <p:ext uri="{521415D9-36F7-43E2-AB2F-B90AF26B5E84}">
       <p14:sectionLst xmlns:p14="http://schemas.microsoft.com/office/powerpoint/2010/main">
-        <p14:section name="Apertura" id="{f76f3362-ccec-a80d-9a14-a539c710cf32}">
+        <p14:section name="Apertura" id="{20cae7eb-8c88-f4d8-4e8d-074415cff94a}">
           <p14:sldIdLst>
             <p14:sldId id="256"/>
             <p14:sldId id="257"/>
           </p14:sldIdLst>
         </p14:section>
-        <p14:section name="Periferiche e controller" id="{c9514ebd-4ab6-013d-e047-ccb523e692fb}">
+        <p14:section name="Periferiche e controller" id="{f1a7e054-9b92-e85d-ec67-fb18ff5fcda7}">
           <p14:sldIdLst>
             <p14:sldId id="258"/>
             <p14:sldId id="259"/>
           </p14:sldIdLst>
         </p14:section>
-        <p14:section name="I bus" id="{3102b85a-c4b4-464e-6d25-2538656b615a}">
+        <p14:section name="I bus" id="{2f622573-c930-ab9e-d4f9-0af7e60af74f}">
           <p14:sldIdLst>
             <p14:sldId id="260"/>
             <p14:sldId id="261"/>
             <p14:sldId id="262"/>
           </p14:sldIdLst>
         </p14:section>
-        <p14:section name="La scheda video" id="{dcb1b635-7920-8a44-ff2a-c80cdd124541}">
+        <p14:section name="La scheda video" id="{d5ee0609-5b93-a968-0db9-afc2df871191}">
           <p14:sldIdLst>
             <p14:sldId id="263"/>
             <p14:sldId id="264"/>
@@ -156,7 +156,7 @@
             <p14:sldId id="269"/>
           </p14:sldIdLst>
         </p14:section>
-        <p14:section name="GPU e GPGPU" id="{3afc9986-c384-11c2-6eca-c552d07f498e}">
+        <p14:section name="GPU e GPGPU" id="{1d1c330c-b929-8092-3c97-1ce1cf07794d}">
           <p14:sldIdLst>
             <p14:sldId id="270"/>
             <p14:sldId id="271"/>
@@ -570,7 +570,7 @@
           <a:p>
             <a:r>
               <a:rPr lang="en-US" dirty="0"/>
-              <a:t>Con questa lezione il corso lascia il processore e si rivolge a ciò che lo circonda. L'argomento è il percorso di un'immagine: da un numero in memoria a un punto di luce sullo schermo. Lungo la strada incontrate due idee generali, il controller di una periferica e il bus, e una macchina specifica, la scheda video, con il suo processore, la GPU. Il kit non ha alcuna scheda video, ed è un vantaggio: ogni passaggio che una scheda nasconderebbe è svolto da codice che potete leggere.
+              <a:t>Con questa lezione il corso lascia il processore e si volge a ciò che lo circonda. L'argomento è il percorso di un'immagine, da un numero in memoria a un punto di luce sullo schermo. Lungo la strada si incontrano due idee generali, il controllore di periferica e il bus, insieme a una macchina specifica, la scheda video e il suo processore, la GPU. Il kit non ha alcuna scheda video, e a fini didattici questo è un vantaggio: ogni passo che una scheda nasconderebbe è eseguito da codice che si può leggere, e di cui si può misurare il costo.
 Stato di apprendimento: DA COMPRENDERE OGGI, alla fine di questa lezione lo spiegate, lo seguite passo passo e lo applicate da soli; DA UTILIZZARE OGGI, oggi seguite e usate la ricetta; come funziona dentro si spiega più avanti, o non fa parte del corso; DA COMPRENDERE PIÙ AVANTI, riconoscete il nome e lo scopo; lo spiega una lezione successiva. Una slide senza etichetta è contesto: una storia, un esempio, una domanda, un esercizio.
 Stato di apprendimento di questa lezione. DA COMPRENDERE OGGI: il frame buffer; i controllori delle periferiche; bus e banda; la scheda video; GPU e GPGPU. DA UTILIZZARE OGGI: il programma completo, gli strumenti di PRG32 (si usa, non si studia, in questo corso). DA COMPRENDERE PIÙ AVANTI: niente. Una slide senza etichetta è contesto: una storia, un esempio, una domanda, un esercizio.
 Per il docente: Spirale: su PRG32 una chiamata disegna un pixel; la lezione segue quel pixel dal frame buffer al display, poi generalizza a bus, schede video, GPU e GPGPU. Il kit non ha una scheda video: fa tutto il suo processore, e questo rende visibile ogni passaggio.</a:t>
@@ -661,7 +661,7 @@
           <a:p>
             <a:r>
               <a:rPr lang="en-US" dirty="0"/>
-              <a:t>Le uscite, in ordine di tempo. VGA, analogica, per i monitor a tubo catodico. DVI, la prima uscita digitale, arrivata con i monitor LCD. HDMI, digitale, che porta anche l'audio. DisplayPort, digitale, che viaggia anche sui connettori USB-C. L'ultima riga è il kit: il display si raggiunge attraverso un bus SPI, e il chip sul modulo del display, un ILI9341, fa la parte dell'elettronica del monitor per un pannello di 320 per 240 pixel.
+              <a:t>Le uscite, in ordine cronologico. VGA, analogica, per i monitor a tubo catodico. DVI, la prima uscita digitale, arrivata con i monitor LCD. HDMI, digitale, che porta anche l'audio. DisplayPort, digitale, che può viaggiare anche su connettori USB-C. L'ultima riga è il kit: il display si raggiunge su un bus SPI, e il chip sul modulo del display, un ILI9341, fa la parte dell'elettronica del monitor per un pannello di 320 per 240 pixel, con una sua memoria per il frame.
 DA COMPRENDERE OGGI: la scheda video.
 Per il docente: High-Definition Multimedia Interface; Digital Visual Interface; Video Graphics Array. L'ILI9341 è il chip sul modulo del display: ha una memoria propria per il frame e pilota i cristalli liquidi (Lezione 21).</a:t>
             </a:r>
@@ -751,7 +751,7 @@
           <a:p>
             <a:r>
               <a:rPr lang="en-US" dirty="0"/>
-              <a:t>La risoluzione è la dimensione della griglia di pixel, colonne per righe. La tabella va da 320 per 200, 64.000 pixel, la risoluzione del Commodore 64 e del viewport di PRG32, al 4K con più di otto milioni. La terza colonna è il rapporto d'aspetto: il tradizionale 4:3 ha lasciato il posto al 16:9. La risoluzione determina la definizione dell'immagine, e anche quanti pixel vanno memorizzati e inviati per ogni frame.
+              <a:t>La risoluzione è la dimensione della griglia di pixel, colonne per righe. La tabella va da 320 per 200, 64.000 pixel, la risoluzione del Commodore 64 e dell'area di gioco di PRG32, al 4K, con più di otto milioni. La terza colonna dà il rapporto d'aspetto, dove il tradizionale 4:3 ha lasciato il posto al 16:9. La risoluzione determina la definizione dell'immagine, e anche il numero di pixel da memorizzare e trasmettere per ogni frame.
 DA COMPRENDERE OGGI: la scheda video.
 Per il docente: La tabella della presentazione originale elencava anche 800 x 600, 1280 x 1024 (5:4) e 1600 x 1200. Il tradizionale rapporto 4:3 ha lasciato il posto al panoramico 16:9. La riga 4K è nuova.</a:t>
             </a:r>
@@ -841,7 +841,7 @@
           <a:p>
             <a:r>
               <a:rPr lang="en-US" dirty="0"/>
-              <a:t>La profondità di colore è il numero di bit per pixel. Con 4 bit ci sono 16 colori; con 8 bit, 256, e ogni valore di solito è un indice in una tabella di colori, la palette; con 16 bit, 65.536, nel formato RGB565 che conoscete; con 24 bit, più di sedici milioni, 256 sfumature per ogni primario. La memoria per un frame è pixel per byte per pixel. PRG32 usa insieme le due righe centrali: un frame buffer a 8 bit di indici e una palette di 256 colori RGB565.
+              <a:t>La profondità di colore è il numero di bit per pixel. Con 4 bit ci sono 16 colori; con 8 bit, 256, ciascun valore di solito un indice in una tabella di colori, la palette; con 16 bit, 65.536, nel familiare formato RGB565; con 24 bit, più di sedici milioni, con 256 livelli per ogni primario. La memoria richiesta da un frame è il numero di pixel per i byte per pixel. PRG32 combina le due righe centrali: un frame buffer a 8 bit di indici e una palette di 256 colori RGB565, scambiando libertà di colore con memoria.
 DA COMPRENDERE OGGI: la scheda video.
 Per il docente: In True Color ogni colore si ottiene da 256 sfumature di ciascuno dei tre primari additivi. PRG32 usa entrambe le righe centrali: un frame buffer a 8 bit di indici di palette, e una palette di 256 colori RGB565 (Lezione 04).</a:t>
             </a:r>
@@ -931,7 +931,7 @@
           <a:p>
             <a:r>
               <a:rPr lang="en-US" dirty="0"/>
-              <a:t>Il percorso del pixel sul kit, in cinque blocchi: il vostro codice, il frame buffer in RAM, la palette che trasforma un indice in un colore, il bus SPI, il display. La tabella fa i conti. Un frame a un byte per pixel sono 64.000 byte; a due byte sarebbe un quarto della RAM del chip. Sul bus ogni pixel viaggia come 16 bit: circa un milione di bit per frame, 38 millisecondi a 27 MHz. Da qui le due risposte ingegneristiche: un frame buffer indicizzato, e inviare solo ciò che è cambiato.
+              <a:t>Il percorso di un pixel sul kit, in cinque stadi: il programma, il frame buffer in RAM, la palette che trasforma un indice in un colore, il bus SPI, il display. La tabella svolge l'aritmetica. Un frame a un byte per pixel occupa 64.000 byte; a due byte consumerebbe un quarto della RAM del chip. Sul bus ogni pixel viaggia come 16 bit, circa un milione di bit per frame, cioè 38 millisecondi a 27 MHz. Ne seguono due risposte ingegneristiche: un frame buffer indicizzato, e trasmettere solo ciò che è cambiato, che la Parte 4 di Verm1 realizza.
 DA COMPRENDERE OGGI: il frame buffer.
 Per il docente: Dati dal repository PRG32 (docs/hardware/ili9341.md): frame buffer indicizzato a 8 bit di 64.000 byte, palette di 512 byte, clock SPI predefinito di 27 MHz, trasferimenti in DMA e tracciamento dei rettangoli modificati. 1.024.000 / 27.000.000 = 37,9 ms. Il contatore di FPS delle cartucce dimostrative mostra il risultato.</a:t>
             </a:r>
@@ -1021,7 +1021,7 @@
           <a:p>
             <a:r>
               <a:rPr lang="en-US" dirty="0"/>
-              <a:t>Gli stessi conti, alla scala di un PC, spiegano la storia dell'hardware video. Più definizione significa più memoria per ogni frame, e il flusso di dati verso la scheda rischia di saturare il bus. Le due risposte sono state più memoria sulla scheda stessa, e un bus più largo o dedicato: prima AGP, oggi PCI Express. La cifra a destra dà la scala: uno schermo 4K a 60 frame al secondo è circa un gigabyte e mezzo di pixel ogni secondo.
+              <a:t>La stessa aritmetica alla scala di un PC spiega la storia dell'hardware video. Una definizione maggiore richiede più memoria per frame, e il flusso di dati verso la scheda minaccia di saturare il bus. Le due risposte sono state più memoria sulla scheda stessa e un bus più largo o dedicato: prima AGP, oggi PCI Express. La cifra a destra rende la scala: uno schermo 4K a 60 frame al secondo equivale a circa un gigabyte e mezzo di pixel ogni secondo.
 DA COMPRENDERE OGGI: la scheda video.
 Per il docente: Con AGP il processore grafico usava parte della memoria centrale con accesso diretto. PCI Express (2004) l'ha sostituito con più banda e più potenza. SLI (NVIDIA) e CrossFire (AMD) collegavano fino a quattro schede; oggi la regola è una sola scheda, oppure molte schede in un server.</a:t>
             </a:r>
@@ -1111,7 +1111,7 @@
           <a:p>
             <a:r>
               <a:rPr lang="en-US" dirty="0"/>
-              <a:t>Con il diffondersi delle interfacce grafiche, calcolare immagini ha occupato una quota crescente del tempo di processore. Per alleggerire la CPU, le schede video hanno ricevuto processori dedicati: le unità di elaborazione grafica, GPU. Accelerano le operazioni raster, come la copia di blocchi di pixel, e la grafica 3D: trasformazioni, texture, illuminazione. I programmi le raggiungono tramite librerie, e un driver di periferica adatta il software alle primitive di ogni GPU. Sul kit non c'è una GPU: un rettangolo è un ciclo di store eseguito dal core RISC-V, e ne potete vedere il costo.
+              <a:t>Con la diffusione delle interfacce grafiche, il calcolo delle immagini ha assorbito una quota crescente del tempo del processore. Per alleggerire la CPU, le schede video hanno acquisito processori dedicati, le unità di elaborazione grafica, che accelerano le operazioni raster, come la copia di blocchi di pixel, e la grafica 3D: trasformazioni, texture, illuminazione. I programmi le raggiungono attraverso librerie, e un driver di dispositivo adatta il software alle primitive di ciascuna GPU. Il kit non ha GPU: un rettangolo è un ciclo di memorizzazioni eseguito dal core RISC-V, e il suo costo è direttamente osservabile.
 DA COMPRENDERE OGGI: GPU e GPGPU.
 Per il docente: Su PRG32 non c'è una GPU: prg32_gfx_rect è un ciclo di istruzioni di store eseguite dal core RISC-V. Per questo la frequenza dei frame di una cartuccia impegnativa cala, e gli studenti possono vedere il costo di ogni pixel.</a:t>
             </a:r>
@@ -1201,7 +1201,7 @@
           <a:p>
             <a:r>
               <a:rPr lang="en-US" dirty="0"/>
-              <a:t>Una GPU applica la stessa operazione, in parallelo, a intere matrici di pixel. Nulla obbliga quei numeri a essere pixel: il GPGPU è l'uso dei processori grafici per il calcolo generico. Una GPU ha un numero molto grande di core semplici, e si programma con modelli come CUDA e OpenCL. Simulazione scientifica, analisi dei dati e, oggi soprattutto, addestramento e uso delle reti neurali girano su GPU. La figura richiama la somma parallela della Lezione 04: la stessa operazione su molti dati insieme.
+              <a:t>Una GPU applica in parallelo la stessa operazione a intere matrici di pixel, e nulla richiede che quei numeri siano pixel: il GPGPU è l'uso dei processori grafici per il calcolo generale. Una GPU contiene un numero molto grande di core semplici e si programma con modelli come CUDA e OpenCL. Simulazione scientifica, analisi dei dati e, soprattutto oggi, addestramento e inferenza delle reti neurali girano su GPU. L'immagine richiama la somma parallela della Lezione 04: una sola operazione applicata a molti dati insieme. La Lezione 24 torna su questo modello di calcolo.
 DA COMPRENDERE OGGI: GPU e GPGPU.
 Per il docente: Compute Unified Device Architecture. La somma parallela della Lezione 04 è il più semplice esempio di GPGPU. I modelli meteorologici e marini del Dipartimento girano su cluster di GPU.</a:t>
             </a:r>
@@ -1291,8 +1291,8 @@
           <a:p>
             <a:r>
               <a:rPr lang="en-US" dirty="0"/>
-              <a:t>La memoria per un frame è il numero di pixel per i byte per pixel. Prima calcolate i pixel, poi ricordate quanti byte sono 24 bit.
-La velocità di trasferimento è larghezza per frequenza. Convertite la larghezza in byte prima di moltiplicare.
+              <a:t>Per la prima domanda: la memoria richiesta da un frame è il numero di pixel per i byte per pixel. Si calcolano prima i pixel, poi si ricorda quanti byte rappresentano 24 bit.
+Per la seconda: la velocità di trasferimento è larghezza per frequenza, con la larghezza convertita in byte prima di moltiplicare.
 Per il docente: 1. Risposta: C. 307.200 pixel x 3 byte = 921.600 byte.
 2. Risposta: B. 2 byte x 50 milioni di trasferimenti al secondo = 100 MB/s.</a:t>
             </a:r>
@@ -1382,8 +1382,8 @@
           <a:p>
             <a:r>
               <a:rPr lang="en-US" dirty="0"/>
-              <a:t>«Indicizzato» è la parola chiave. Il byte non descrive il colore: dice dove trovarlo.
-Sciogliete l'acronimo: le prime due lettere stanno per «general-purpose».
+              <a:t>Per la prima domanda "indicizzato" è la parola chiave: il byte non descrive il colore ma indica dove trovarlo.
+Per la seconda si espande l'acronimo: le sue prime due lettere stanno per "general-purpose", di uso generale.
 Per il docente: 1. Risposta: C. Il byte è un indice; il colore vero si cerca in una tabella di 256 voci, la palette.
 2. Risposta: B. General-purpose computing on graphics processing units: calcolo generico su unità di elaborazione grafica.</a:t>
             </a:r>
@@ -1473,7 +1473,7 @@
           <a:p>
             <a:r>
               <a:rPr lang="en-US" dirty="0"/>
-              <a:t>Dieci termini. Peripheral è la periferica; il suo controller conserva il nome inglese. Bus width e transfer rate sono larghezza del bus e velocità di trasferimento. Colour depth è la profondità di colore. Palette è la tavolozza, anche se i programmatori dicono palette. Un device driver è il software che adatta i programmi a un dispositivo specifico.</a:t>
+              <a:t>Dieci termini. Una peripheral è una periferica; il suo controller conserva il nome inglese. Bus width e transfer rate sono larghezza del bus e velocità di trasferimento. Colour depth è profondità di colore. Una palette è una tavolozza, anche se i programmatori dicono palette. Un device driver è il software che adatta i programmi a uno specifico dispositivo.</a:t>
             </a:r>
             <a:endParaRPr lang="en-US" dirty="0"/>
           </a:p>
@@ -1561,7 +1561,7 @@
           <a:p>
             <a:r>
               <a:rPr lang="en-US" dirty="0"/>
-              <a:t>Cinque obiettivi. Spiegare che cos'è il controller di una periferica e perché i dispositivi vanno sincronizzati con il processore. Caratterizzare un bus per larghezza, velocità e velocità di trasferimento. Descrivere il compito di una scheda video: frame buffer, risoluzione, profondità di colore e interfaccia di uscita. Calcolare quanta memoria serve a un frame e quanto tempo occorre per inviarlo lungo un bus. E spiegare che cosa fa una GPU e che cosa significa usarla per il calcolo generico.</a:t>
+              <a:t>Cinque risultati di apprendimento. Spiegare che cos'è un controllore di periferica e perché i dispositivi vanno sincronizzati con il processore. Caratterizzare un bus per larghezza, velocità e velocità di trasferimento. Descrivere la funzione di una scheda video: frame buffer, risoluzione, profondità di colore e interfaccia di uscita. Calcolare la memoria che un frame richiede e il tempo necessario a inviarlo su un bus. E spiegare che cosa fa una GPU e che cosa significa usarla per il calcolo di uso generale.</a:t>
             </a:r>
             <a:endParaRPr lang="en-US" dirty="0"/>
           </a:p>
@@ -1649,7 +1649,7 @@
           <a:p>
             <a:r>
               <a:rPr lang="en-US" dirty="0"/>
-              <a:t>Cinque conclusioni. I dispositivi di ingresso/uscita sono una parte fondamentale di un calcolatore. Ciascuno è gestito da un controller che lo interfaccia al bus. Un bus è caratterizzato da larghezza, velocità e velocità di trasferimento, e la sua banda è un limite di cui il progetto deve tenere conto. Una scheda video visualizza grafica e testo: un frame buffer, una risoluzione, una profondità di colore, un'uscita. E i suoi processori, le GPU, si usano oggi per il calcolo ad alte prestazioni. La prossima lezione tratta gli altri dispositivi di ingresso e di uscita.
+              <a:t>Cinque conclusioni. I dispositivi di ingresso/uscita sono una parte fondamentale di un calcolatore. Ciascuno è gestito da un controllore che lo interfaccia al bus. Un bus è caratterizzato da larghezza, velocità e velocità di trasferimento, e la sua banda è un vincolo che i progetti devono rispettare. Una scheda video mostra grafica e testo attraverso un frame buffer, una risoluzione, una profondità di colore e un'interfaccia di uscita. E i suoi processori, le GPU, si usano oggi per il calcolo ad alte prestazioni. La prossima lezione tratta gli altri dispositivi di ingresso e di uscita.
 Stato di apprendimento, riepilogo. DA COMPRENDERE OGGI: il frame buffer; i controllori delle periferiche; bus e banda; la scheda video; GPU e GPGPU. DA UTILIZZARE OGGI: il programma completo, gli strumenti di PRG32 (si usa, non si studia, in questo corso). DA COMPRENDERE PIÙ AVANTI: niente. Una slide senza etichetta è contesto: una storia, un esempio, una domanda, un esercizio.
 Per il docente: Prossima lezione: i dispositivi di ingresso e di uscita.</a:t>
             </a:r>
@@ -1739,7 +1739,7 @@
           <a:p>
             <a:r>
               <a:rPr lang="en-US" dirty="0"/>
-              <a:t>Le periferiche servono all'interazione tra l'utente e il sistema. Hanno un'autonomia limitata: il processore le controlla e le coordina. E lavorano in modo asincrono, al proprio ritmo, quindi servono meccanismi di sincronizzazione: per sapere quando è disponibile un dato in ingresso, e quando un dispositivo di uscita ha finito. Il terminale, lo strumento di interazione più comune, è in realtà due dispositivi indipendenti, una tastiera e un video; è il processore a copiare sul video ciò che arriva dalla tastiera.
+              <a:t>Le periferiche servono all'interazione tra l'utente e il sistema. Godono di un'autonomia limitata, essendo controllate e coordinate dal processore. E operano in modo asincrono, al proprio ritmo, quindi servono meccanismi di sincronizzazione: per sapere quando un dato di ingresso è disponibile, e quando un dispositivo di uscita ha completato il suo compito. Il terminale, lo strumento di interazione più comune, consiste in realtà di due dispositivi indipendenti, una tastiera e un display; è il processore a copiare sul display ciò che arriva dalla tastiera.
 DA COMPRENDERE OGGI: i controllori delle periferiche.
 Per il docente: Tastiera e video non sono collegati direttamente: è il processore a riprodurre sul video ciò che arriva dalla tastiera (Lezione 21).</a:t>
             </a:r>
@@ -1829,7 +1829,7 @@
           <a:p>
             <a:r>
               <a:rPr lang="en-US" dirty="0"/>
-              <a:t>Una periferica non è mai collegata direttamente al processore: in mezzo c'è un controller. Guardate lo schema: il processore e la memoria stanno sul bus, e così i controller; ogni controller ha il proprio dispositivo dall'altra parte. Il controller gestisce il dialogo con il dispositivo e presenta sul bus pochi registri, che il processore legge e scrive come memoria. Quando un'operazione termina, di solito alza un'interruzione, come nella lezione precedente. La scheda video è il controller del monitor.
+              <a:t>Una periferica non è mai collegata direttamente al processore: si interpone un controllore. Nello schema processore e memoria stanno sul bus, e così i controllori, ciascuno con il suo dispositivo dall'altro lato. Il controllore gestisce il dialogo con il dispositivo e presenta sul bus alcuni registri, che il processore legge e scrive come memoria, con l'I/O mappato in memoria della Lezione 15. Al completamento di un'operazione il controllore di norma solleva un'interruzione, come nella lezione precedente. La scheda video è il controllore del monitor.
 DA COMPRENDERE OGGI: i controllori delle periferiche.
 Per il docente: Sull'ESP32-C6 i controller (SPI, I2S, GPIO, USB) stanno sullo stesso chip del processore, e i loro registri sono mappati in memoria (Lezione 15).</a:t>
             </a:r>
@@ -1919,7 +1919,7 @@
           <a:p>
             <a:r>
               <a:rPr lang="en-US" dirty="0"/>
-              <a:t>Un bus è un canale di comunicazione condiviso da più unità, e le sue caratteristiche decidono le prestazioni dell'intero sistema. La sua larghezza è il numero di bit del bus dati. La sua velocità è la frequenza a cui lavora. Il loro prodotto è la velocità di trasferimento: un bus a 32 bit a 66 MHz porta 4 byte 66 milioni di volte al secondo, 264 megabyte al secondo. Un bus è anche uno standard: segnali, connettori e un protocollo su cui tutte le unità concordano.
+              <a:t>Un bus è un canale di comunicazione condiviso da più unità, e le sue caratteristiche determinano le prestazioni dell'intero sistema. La sua larghezza è il numero di bit del bus dati; la sua velocità è la frequenza a cui opera; il loro prodotto è la velocità di trasferimento. Un bus a 32 bit a 66 MHz porta 4 byte 66 milioni di volte al secondo, 264 megabyte al secondo. Un bus è anche uno standard: segnali, connettori e un protocollo su cui tutte le unità collegate concordano.
 DA COMPRENDERE OGGI: bus e banda.
 Per il docente: L'esempio è il bus PCI: 4 byte x 66 milioni di cicli al secondo = 264 MB/s. Interfaccia: il modulo hardware che codifica i dati in forma elettrica o ottica. Protocollo: la descrizione di livello più alto di come si svolge il dialogo.</a:t>
             </a:r>
@@ -2009,7 +2009,7 @@
           <a:p>
             <a:r>
               <a:rPr lang="en-US" dirty="0"/>
-              <a:t>Perché i bus, e che cosa costano. I vantaggi: si aggiungono facilmente nuovi dispositivi; una periferica può passare a un altro calcolatore con lo stesso bus; un solo insieme di fili collega molte periferiche; il costo per byte è basso. Gli svantaggi: la banda del bus limita la velocità di trasferimento; la velocità massima cala quando il bus si allunga e quando i dispositivi collegati aumentano; e, essendo condiviso, il bus porta un solo trasferimento alla volta.
+              <a:t>Pregi e costi dei bus. I vantaggi: si aggiungono facilmente nuovi dispositivi; una periferica si può spostare su un altro calcolatore con lo stesso bus; un solo insieme di fili collega molte periferiche; il costo per byte trasferito è basso. Gli svantaggi: la banda del bus limita la velocità di trasferimento; la velocità massima diminuisce man mano che il bus si allunga e che vi si collegano più dispositivi; e, essendo condiviso, il bus porta un solo trasferimento alla volta, la limitazione già osservata per il bus comune della Lezione 14.
 DA COMPRENDERE OGGI: bus e banda.</a:t>
             </a:r>
             <a:endParaRPr lang="en-US" dirty="0"/>
@@ -2098,7 +2098,7 @@
           <a:p>
             <a:r>
               <a:rPr lang="en-US" dirty="0"/>
-              <a:t>Quarant'anni di bus in una tabella. Leggetela per colonne. I primi bus, ISA, PCI, AGP per la sola scheda video, IDE e SCSI per i dischi, erano paralleli: molti fili affiancati. I loro successori, PCI Express, Serial ATA, USB, sono seriali: pochi fili, molto più veloci. È la lezione della Lezione 14. L'ultima riga è il kit: SPI, I2C e I2S sono i piccoli bus seriali che collegano i chip sulla stessa scheda.
+              <a:t>Quarant'anni di bus in una tabella, da leggere per colonne. I primi bus, ISA, PCI, AGP per la sola scheda video, IDE e SCSI per i dischi, erano paralleli, con molti fili affiancati. I loro successori, PCI Express, Serial ATA e USB, sono seriali: pochi fili, velocità molto più alte. È la tendenza enunciata nella Lezione 14, ora documentata storicamente. L'ultima riga è il kit: SPI, I2C e I2S sono i piccoli bus seriali che collegano chip sulla stessa scheda.
 DA COMPRENDERE OGGI: bus e banda.
 Per il docente: USB: universal serial bus. PCI: peripheral component interconnect. AGP: accelerated graphics port. IDE: integrated device electronics. ISA: industry standard architecture. SCSI: small computer system interface. Nell'elenco originale c'erano anche PCMCIA e FireWire. Il passaggio dal parallelo al seriale è la lezione della Lezione 14.</a:t>
             </a:r>
@@ -2188,7 +2188,7 @@
           <a:p>
             <a:r>
               <a:rPr lang="en-US" dirty="0"/>
-              <a:t>La funzione di una scheda video è inviare al monitor le informazioni da visualizzare. Traduce la rappresentazione dell'immagine prodotta dal processore in una forma che il monitor può mostrare. Ha una memoria propria, la memoria video, che conserva il frame: il frame buffer. Ogni volta che lo schermo viene ridisegnato, la scheda legge quella memoria e invia il segnale per il colore di ogni pixel. E ha una capacità di elaborazione propria, che l'ultima parte della lezione esamina.
+              <a:t>La funzione di una scheda video è fornire al monitor l'informazione da mostrare. Traduce la rappresentazione dell'immagine prodotta dal processore in una forma che il monitor può rendere. Ha una memoria propria, la memoria video, che contiene il frame, il frame buffer. A ogni aggiornamento dello schermo la scheda legge quella memoria ed emette il segnale che codifica il colore di ogni pixel. Ha anche una propria capacità di elaborazione, che l'ultima parte della lezione esamina.
 DA COMPRENDERE OGGI: la scheda video.
 Per il docente: DAC: convertitore digitale-analogico, necessario per i monitor analogici. Su PRG32 la «scheda video» è una regione di RAM più la periferica SPI: nessun hardware separato.</a:t>
             </a:r>
@@ -2278,7 +2278,7 @@
           <a:p>
             <a:r>
               <a:rPr lang="en-US" dirty="0"/>
-              <a:t>Due generazioni di monitor. Un monitor a tubo catodico ha un ingresso analogico: la scheda deve convertire l'immagine digitale in segnali analogici con un componente detto RAMDAC, e lungo il cavo entrano rumore e distorsione. Un monitor a cristalli liquidi ha un ingresso digitale: la scheda adatta colori e risoluzione, e ogni pixel dell'uscita corrisponde esattamente a un pixel dello schermo. La conversione in analogico, con i suoi difetti, scompare.
+              <a:t>Due generazioni di monitor. Un monitor a tubo catodico ha un ingresso analogico: la scheda deve convertire l'immagine digitale in segnali analogici con un componente chiamato RAMDAC, e lungo il cavo entrano rumore e distorsione. Un monitor a cristalli liquidi ha un ingresso digitale: la scheda adatta colori e risoluzione, e ogni pixel di uscita corrisponde esattamente a un pixel del pannello. La conversione in analogico, e i suoi difetti, scompaiono, un caso del vantaggio della rappresentazione digitale sostenuto nella Lezione 10.
 DA COMPRENDERE OGGI: la scheda video.
 Per il docente: RAMDAC: random access memory digital-analog converter. Il DVI poteva portare anche i segnali analogici VGA, per compatibilità.</a:t>
             </a:r>
@@ -3358,7 +3358,7 @@
                 <a:ea typeface="Calibri" pitchFamily="34" charset="-122"/>
                 <a:cs typeface="Calibri" pitchFamily="34" charset="-120"/>
               </a:rPr>
-              <a:t>20-Architettura_dei_Calcolatori-Scheda_Video-Codice.pptx</a:t>
+              <a:t>20-Architettura_dei_Calcolatori-Scheda_Video-Lab.pptx</a:t>
             </a:r>
             <a:endParaRPr lang="en-US" sz="1300" dirty="0"/>
           </a:p>

--- a/it/slides/20-Architettura_dei_Calcolatori-Scheda_Video.pptx
+++ b/it/slides/20-Architettura_dei_Calcolatori-Scheda_Video.pptx
@@ -126,26 +126,26 @@
   <p:extLst>
     <p:ext uri="{521415D9-36F7-43E2-AB2F-B90AF26B5E84}">
       <p14:sectionLst xmlns:p14="http://schemas.microsoft.com/office/powerpoint/2010/main">
-        <p14:section name="Apertura" id="{20cae7eb-8c88-f4d8-4e8d-074415cff94a}">
+        <p14:section name="Apertura" id="{7a05d68e-4114-0eb3-d30b-5cff318ab8fc}">
           <p14:sldIdLst>
             <p14:sldId id="256"/>
             <p14:sldId id="257"/>
           </p14:sldIdLst>
         </p14:section>
-        <p14:section name="Periferiche e controller" id="{f1a7e054-9b92-e85d-ec67-fb18ff5fcda7}">
+        <p14:section name="Periferiche e controller" id="{6a53f433-68a1-ce9b-3f0b-c007804fdb78}">
           <p14:sldIdLst>
             <p14:sldId id="258"/>
             <p14:sldId id="259"/>
           </p14:sldIdLst>
         </p14:section>
-        <p14:section name="I bus" id="{2f622573-c930-ab9e-d4f9-0af7e60af74f}">
+        <p14:section name="I bus" id="{650b6c77-a6c9-2860-8003-3a41332192b6}">
           <p14:sldIdLst>
             <p14:sldId id="260"/>
             <p14:sldId id="261"/>
             <p14:sldId id="262"/>
           </p14:sldIdLst>
         </p14:section>
-        <p14:section name="La scheda video" id="{d5ee0609-5b93-a968-0db9-afc2df871191}">
+        <p14:section name="La scheda video" id="{5de6282c-a0e6-784c-430d-f1dcdec666a7}">
           <p14:sldIdLst>
             <p14:sldId id="263"/>
             <p14:sldId id="264"/>
@@ -156,7 +156,7 @@
             <p14:sldId id="269"/>
           </p14:sldIdLst>
         </p14:section>
-        <p14:section name="GPU e GPGPU" id="{1d1c330c-b929-8092-3c97-1ce1cf07794d}">
+        <p14:section name="GPU e GPGPU" id="{e18c3c12-534e-0b4a-b8ed-89ab19206fb2}">
           <p14:sldIdLst>
             <p14:sldId id="270"/>
             <p14:sldId id="271"/>

--- a/it/slides/20-Architettura_dei_Calcolatori-Scheda_Video.pptx
+++ b/it/slides/20-Architettura_dei_Calcolatori-Scheda_Video.pptx
@@ -126,26 +126,26 @@
   <p:extLst>
     <p:ext uri="{521415D9-36F7-43E2-AB2F-B90AF26B5E84}">
       <p14:sectionLst xmlns:p14="http://schemas.microsoft.com/office/powerpoint/2010/main">
-        <p14:section name="Apertura" id="{7a05d68e-4114-0eb3-d30b-5cff318ab8fc}">
+        <p14:section name="Apertura" id="{16bc93f9-a9ae-0db5-05c1-b4b924ffaa2d}">
           <p14:sldIdLst>
             <p14:sldId id="256"/>
             <p14:sldId id="257"/>
           </p14:sldIdLst>
         </p14:section>
-        <p14:section name="Periferiche e controller" id="{6a53f433-68a1-ce9b-3f0b-c007804fdb78}">
+        <p14:section name="Periferiche e controller" id="{bcec34ce-2266-36f9-19a7-ad35b846b608}">
           <p14:sldIdLst>
             <p14:sldId id="258"/>
             <p14:sldId id="259"/>
           </p14:sldIdLst>
         </p14:section>
-        <p14:section name="I bus" id="{650b6c77-a6c9-2860-8003-3a41332192b6}">
+        <p14:section name="I bus" id="{e3c290b3-9cae-605a-24c1-13f454fbd684}">
           <p14:sldIdLst>
             <p14:sldId id="260"/>
             <p14:sldId id="261"/>
             <p14:sldId id="262"/>
           </p14:sldIdLst>
         </p14:section>
-        <p14:section name="La scheda video" id="{5de6282c-a0e6-784c-430d-f1dcdec666a7}">
+        <p14:section name="La scheda video" id="{54f464af-8ac4-12ef-6557-9db7a8690d3e}">
           <p14:sldIdLst>
             <p14:sldId id="263"/>
             <p14:sldId id="264"/>
@@ -156,7 +156,7 @@
             <p14:sldId id="269"/>
           </p14:sldIdLst>
         </p14:section>
-        <p14:section name="GPU e GPGPU" id="{e18c3c12-534e-0b4a-b8ed-89ab19206fb2}">
+        <p14:section name="GPU e GPGPU" id="{72fe073e-b1d5-be57-d8f9-df83f946cc54}">
           <p14:sldIdLst>
             <p14:sldId id="270"/>
             <p14:sldId id="271"/>
@@ -573,6 +573,7 @@
               <a:t>Con questa lezione il corso lascia il processore e si volge a ciò che lo circonda. L'argomento è il percorso di un'immagine, da un numero in memoria a un punto di luce sullo schermo. Lungo la strada si incontrano due idee generali, il controllore di periferica e il bus, insieme a una macchina specifica, la scheda video e il suo processore, la GPU. Il kit non ha alcuna scheda video, e a fini didattici questo è un vantaggio: ogni passo che una scheda nasconderebbe è eseguito da codice che si può leggere, e di cui si può misurare il costo.
 Stato di apprendimento: DA COMPRENDERE OGGI, alla fine di questa lezione lo spiegate, lo seguite passo passo e lo applicate da soli; DA UTILIZZARE OGGI, oggi seguite e usate la ricetta; come funziona dentro si spiega più avanti, o non fa parte del corso; DA COMPRENDERE PIÙ AVANTI, riconoscete il nome e lo scopo; lo spiega una lezione successiva. Una slide senza etichetta è contesto: una storia, un esempio, una domanda, un esercizio.
 Stato di apprendimento di questa lezione. DA COMPRENDERE OGGI: il frame buffer; i controllori delle periferiche; bus e banda; la scheda video; GPU e GPGPU. DA UTILIZZARE OGGI: il programma completo, gli strumenti di PRG32 (si usa, non si studia, in questo corso). DA COMPRENDERE PIÙ AVANTI: niente. Una slide senza etichetta è contesto: una storia, un esempio, una domanda, un esercizio.
+Percorso. I risultati di oggi: (1) spiegare perché i dispositivi stanno dietro ai controllori e come il processore dialoga con loro; (2) calcolare la dimensione di un frame buffer e la banda di un segnale video; (3) descrivere che cosa fanno una scheda video e una GPU. Si appoggia su: solo ciò che ha preparato la Lezione 01. Prossimo passo: Lezione 21, Ingresso e uscita.
 Per il docente: Spirale: su PRG32 una chiamata disegna un pixel; la lezione segue quel pixel dal frame buffer al display, poi generalizza a bus, schede video, GPU e GPGPU. Il kit non ha una scheda video: fa tutto il suo processore, e questo rende visibile ogni passaggio.</a:t>
             </a:r>
             <a:endParaRPr lang="en-US" dirty="0"/>
@@ -1650,7 +1651,7 @@
             <a:r>
               <a:rPr lang="en-US" dirty="0"/>
               <a:t>Cinque conclusioni. I dispositivi di ingresso/uscita sono una parte fondamentale di un calcolatore. Ciascuno è gestito da un controllore che lo interfaccia al bus. Un bus è caratterizzato da larghezza, velocità e velocità di trasferimento, e la sua banda è un vincolo che i progetti devono rispettare. Una scheda video mostra grafica e testo attraverso un frame buffer, una risoluzione, una profondità di colore e un'interfaccia di uscita. E i suoi processori, le GPU, si usano oggi per il calcolo ad alte prestazioni. La prossima lezione tratta gli altri dispositivi di ingresso e di uscita.
-Stato di apprendimento, riepilogo. DA COMPRENDERE OGGI: il frame buffer; i controllori delle periferiche; bus e banda; la scheda video; GPU e GPGPU. DA UTILIZZARE OGGI: il programma completo, gli strumenti di PRG32 (si usa, non si studia, in questo corso). DA COMPRENDERE PIÙ AVANTI: niente. Una slide senza etichetta è contesto: una storia, un esempio, una domanda, un esercizio.
+Stato di apprendimento, riepilogo. DA COMPRENDERE OGGI: il frame buffer; i controllori delle periferiche; bus e banda; la scheda video; GPU e GPGPU. DA UTILIZZARE OGGI: il programma completo, gli strumenti di PRG32 (si usa, non si studia, in questo corso). DA COMPRENDERE PIÙ AVANTI: niente. Una slide senza etichetta è contesto: una storia, un esempio, una domanda, un esercizio. Il filo della lezione: Ogni rettangolo disegnato dalla Lezione 02 è finito in un frame buffer che un controllore invia allo schermo molte volte al secondo. Prossimo passo: gli altri dispositivi: display, tastiere, stampanti. Biglietto d'uscita (da due a quattro minuti, da soli, su carta): 1. Perché un dispositivo non è mai collegato direttamente al processore? Dite che cosa fa il suo controllore e come il processore dialoga con esso. 2. Uno schermo di 320 x 200 pixel usa 16 bit per pixel ed è ridisegnato 30 volte al secondo. Quanta memoria serve per il frame buffer, e quanti byte al secondo devono raggiungere lo schermo?
 Per il docente: Prossima lezione: i dispositivi di ingresso e di uscita.</a:t>
             </a:r>
             <a:endParaRPr lang="en-US" dirty="0"/>
